--- a/tutor-time/made-to-look-real/downloads/Made_to_Look_Real.pptx
+++ b/tutor-time/made-to-look-real/downloads/Made_to_Look_Real.pptx
@@ -3206,11 +3206,11 @@
               </a:spcAft>
             </a:pPr>
             <a:r>
-              <a:rPr sz="4400" b="1" i="0">
+              <a:rPr sz="4400" b="0" i="0">
                 <a:solidFill>
                   <a:srgbClr val="036D97"/>
                 </a:solidFill>
-                <a:latin typeface="Libre Caslon Display"/>
+                <a:latin typeface="Georgia"/>
               </a:rPr>
               <a:t>Made to Look Real</a:t>
             </a:r>
@@ -3297,7 +3297,7 @@
                 <a:solidFill>
                   <a:srgbClr val="5C6552"/>
                 </a:solidFill>
-                <a:latin typeface="Karla"/>
+                <a:latin typeface="Calibri"/>
               </a:rPr>
               <a:t>Deepfakes and AI-made content</a:t>
             </a:r>
@@ -3340,7 +3340,7 @@
                 <a:solidFill>
                   <a:srgbClr val="8B9179"/>
                 </a:solidFill>
-                <a:latin typeface="Karla"/>
+                <a:latin typeface="Calibri"/>
               </a:rPr>
               <a:t>Tutor Time  ·  Year 8 to 11</a:t>
             </a:r>
@@ -3408,7 +3408,7 @@
                 <a:solidFill>
                   <a:srgbClr val="8B9179"/>
                 </a:solidFill>
-                <a:latin typeface="Karla"/>
+                <a:latin typeface="Calibri"/>
               </a:rPr>
               <a:t>The Pastoral Guide</a:t>
             </a:r>
@@ -3451,7 +3451,7 @@
                 <a:solidFill>
                   <a:srgbClr val="8B9179"/>
                 </a:solidFill>
-                <a:latin typeface="Karla"/>
+                <a:latin typeface="Calibri"/>
               </a:rPr>
               <a:t>1 / 18</a:t>
             </a:r>
@@ -3522,61 +3522,6 @@
       </p:sp>
       <p:sp>
         <p:nvSpPr>
-          <p:cNvPr id="3" name="Rounded Rectangle 2"/>
-          <p:cNvSpPr/>
-          <p:nvPr/>
-        </p:nvSpPr>
-        <p:spPr>
-          <a:xfrm>
-            <a:off x="685800" y="329184"/>
-            <a:ext cx="1101575" cy="237744"/>
-          </a:xfrm>
-          <a:prstGeom prst="roundRect">
-            <a:avLst>
-              <a:gd name="adj" fmla="val 50000"/>
-            </a:avLst>
-          </a:prstGeom>
-          <a:solidFill>
-            <a:srgbClr val="EDF5F8"/>
-          </a:solidFill>
-          <a:ln>
-            <a:noFill/>
-          </a:ln>
-          <a:effectLst/>
-        </p:spPr>
-        <p:style>
-          <a:lnRef idx="1">
-            <a:schemeClr val="accent1"/>
-          </a:lnRef>
-          <a:fillRef idx="3">
-            <a:schemeClr val="accent1"/>
-          </a:fillRef>
-          <a:effectRef idx="0">
-            <a:schemeClr val="accent1"/>
-          </a:effectRef>
-          <a:fontRef idx="minor">
-            <a:schemeClr val="lt1"/>
-          </a:fontRef>
-        </p:style>
-        <p:txBody>
-          <a:bodyPr rtlCol="0" anchor="ctr" wrap="none" lIns="0" rIns="0" tIns="0" bIns="0"/>
-          <a:lstStyle/>
-          <a:p>
-            <a:pPr algn="ctr"/>
-            <a:r>
-              <a:rPr sz="950" b="1" spc="90">
-                <a:solidFill>
-                  <a:srgbClr val="036D97"/>
-                </a:solidFill>
-                <a:latin typeface="Karla"/>
-              </a:rPr>
-              <a:t>TOGETHER</a:t>
-            </a:r>
-          </a:p>
-        </p:txBody>
-      </p:sp>
-      <p:sp>
-        <p:nvSpPr>
           <p:cNvPr id="4" name="TextBox 3"/>
           <p:cNvSpPr txBox="1"/>
           <p:nvPr/>
@@ -3607,11 +3552,11 @@
               </a:spcAft>
             </a:pPr>
             <a:r>
-              <a:rPr sz="2600" b="1" i="0">
+              <a:rPr sz="2600" b="0" i="0">
                 <a:solidFill>
                   <a:srgbClr val="036D97"/>
                 </a:solidFill>
-                <a:latin typeface="Libre Caslon Display"/>
+                <a:latin typeface="Georgia"/>
               </a:rPr>
               <a:t>Together: a cracked bridge</a:t>
             </a:r>
@@ -3654,7 +3599,7 @@
                 <a:solidFill>
                   <a:srgbClr val="2E3436"/>
                 </a:solidFill>
-                <a:latin typeface="Karla"/>
+                <a:latin typeface="Calibri"/>
               </a:rPr>
               <a:t>A photo of the town bridge with a huge crack down the middle is spreading. It was posted by an account with no other posts, and hundreds of people are commenting “it’s going to fall”.</a:t>
             </a:r>
@@ -3793,7 +3738,7 @@
                 <a:solidFill>
                   <a:srgbClr val="036D97"/>
                 </a:solidFill>
-                <a:latin typeface="Karla"/>
+                <a:latin typeface="Calibri"/>
               </a:rPr>
               <a:t>Go through the five checks as a class. What would you check first, and what would you do?</a:t>
             </a:r>
@@ -3926,7 +3871,7 @@
                 <a:solidFill>
                   <a:srgbClr val="FFFDF7"/>
                 </a:solidFill>
-                <a:latin typeface="Karla"/>
+                <a:latin typeface="Calibri"/>
               </a:rPr>
               <a:t>1</a:t>
             </a:r>
@@ -3969,7 +3914,7 @@
                 <a:solidFill>
                   <a:srgbClr val="036D97"/>
                 </a:solidFill>
-                <a:latin typeface="Karla"/>
+                <a:latin typeface="Calibri"/>
               </a:rPr>
               <a:t>Who first?</a:t>
             </a:r>
@@ -4102,7 +4047,7 @@
                 <a:solidFill>
                   <a:srgbClr val="FFFDF7"/>
                 </a:solidFill>
-                <a:latin typeface="Karla"/>
+                <a:latin typeface="Calibri"/>
               </a:rPr>
               <a:t>2</a:t>
             </a:r>
@@ -4145,7 +4090,7 @@
                 <a:solidFill>
                   <a:srgbClr val="036D97"/>
                 </a:solidFill>
-                <a:latin typeface="Karla"/>
+                <a:latin typeface="Calibri"/>
               </a:rPr>
               <a:t>Where else?</a:t>
             </a:r>
@@ -4278,7 +4223,7 @@
                 <a:solidFill>
                   <a:srgbClr val="FFFDF7"/>
                 </a:solidFill>
-                <a:latin typeface="Karla"/>
+                <a:latin typeface="Calibri"/>
               </a:rPr>
               <a:t>3</a:t>
             </a:r>
@@ -4321,7 +4266,7 @@
                 <a:solidFill>
                   <a:srgbClr val="036D97"/>
                 </a:solidFill>
-                <a:latin typeface="Karla"/>
+                <a:latin typeface="Calibri"/>
               </a:rPr>
               <a:t>Fast reaction?</a:t>
             </a:r>
@@ -4454,7 +4399,7 @@
                 <a:solidFill>
                   <a:srgbClr val="FFFDF7"/>
                 </a:solidFill>
-                <a:latin typeface="Karla"/>
+                <a:latin typeface="Calibri"/>
               </a:rPr>
               <a:t>4</a:t>
             </a:r>
@@ -4497,7 +4442,7 @@
                 <a:solidFill>
                   <a:srgbClr val="036D97"/>
                 </a:solidFill>
-                <a:latin typeface="Karla"/>
+                <a:latin typeface="Calibri"/>
               </a:rPr>
               <a:t>Would they?</a:t>
             </a:r>
@@ -4630,7 +4575,7 @@
                 <a:solidFill>
                   <a:srgbClr val="FFFDF7"/>
                 </a:solidFill>
-                <a:latin typeface="Karla"/>
+                <a:latin typeface="Calibri"/>
               </a:rPr>
               <a:t>5</a:t>
             </a:r>
@@ -4673,7 +4618,7 @@
                 <a:solidFill>
                   <a:srgbClr val="036D97"/>
                 </a:solidFill>
-                <a:latin typeface="Karla"/>
+                <a:latin typeface="Calibri"/>
               </a:rPr>
               <a:t>Ask another way</a:t>
             </a:r>
@@ -4741,7 +4686,7 @@
                 <a:solidFill>
                   <a:srgbClr val="8B9179"/>
                 </a:solidFill>
-                <a:latin typeface="Karla"/>
+                <a:latin typeface="Calibri"/>
               </a:rPr>
               <a:t>The Pastoral Guide</a:t>
             </a:r>
@@ -4784,7 +4729,7 @@
                 <a:solidFill>
                   <a:srgbClr val="8B9179"/>
                 </a:solidFill>
-                <a:latin typeface="Karla"/>
+                <a:latin typeface="Calibri"/>
               </a:rPr>
               <a:t>10 / 18</a:t>
             </a:r>
@@ -4855,61 +4800,6 @@
       </p:sp>
       <p:sp>
         <p:nvSpPr>
-          <p:cNvPr id="3" name="Rounded Rectangle 2"/>
-          <p:cNvSpPr/>
-          <p:nvPr/>
-        </p:nvSpPr>
-        <p:spPr>
-          <a:xfrm>
-            <a:off x="685800" y="329184"/>
-            <a:ext cx="2003214" cy="237744"/>
-          </a:xfrm>
-          <a:prstGeom prst="roundRect">
-            <a:avLst>
-              <a:gd name="adj" fmla="val 50000"/>
-            </a:avLst>
-          </a:prstGeom>
-          <a:solidFill>
-            <a:srgbClr val="036D97"/>
-          </a:solidFill>
-          <a:ln>
-            <a:noFill/>
-          </a:ln>
-          <a:effectLst/>
-        </p:spPr>
-        <p:style>
-          <a:lnRef idx="1">
-            <a:schemeClr val="accent1"/>
-          </a:lnRef>
-          <a:fillRef idx="3">
-            <a:schemeClr val="accent1"/>
-          </a:fillRef>
-          <a:effectRef idx="0">
-            <a:schemeClr val="accent1"/>
-          </a:effectRef>
-          <a:fontRef idx="minor">
-            <a:schemeClr val="lt1"/>
-          </a:fontRef>
-        </p:style>
-        <p:txBody>
-          <a:bodyPr rtlCol="0" anchor="ctr" wrap="none" lIns="0" rIns="0" tIns="0" bIns="0"/>
-          <a:lstStyle/>
-          <a:p>
-            <a:pPr algn="ctr"/>
-            <a:r>
-              <a:rPr sz="950" b="1" spc="90">
-                <a:solidFill>
-                  <a:srgbClr val="FFFDF7"/>
-                </a:solidFill>
-                <a:latin typeface="Karla"/>
-              </a:rPr>
-              <a:t>THE SAME EVERY TIME</a:t>
-            </a:r>
-          </a:p>
-        </p:txBody>
-      </p:sp>
-      <p:sp>
-        <p:nvSpPr>
           <p:cNvPr id="4" name="TextBox 3"/>
           <p:cNvSpPr txBox="1"/>
           <p:nvPr/>
@@ -4940,11 +4830,11 @@
               </a:spcAft>
             </a:pPr>
             <a:r>
-              <a:rPr sz="2800" b="1" i="0">
+              <a:rPr sz="2800" b="0" i="0">
                 <a:solidFill>
                   <a:srgbClr val="036D97"/>
                 </a:solidFill>
-                <a:latin typeface="Libre Caslon Display"/>
+                <a:latin typeface="Georgia"/>
               </a:rPr>
               <a:t>One kind of fake is different</a:t>
             </a:r>
@@ -4987,7 +4877,7 @@
                 <a:solidFill>
                   <a:srgbClr val="5C6552"/>
                 </a:solidFill>
-                <a:latin typeface="Karla"/>
+                <a:latin typeface="Calibri"/>
               </a:rPr>
               <a:t>A fake sexual image of a real student, for example one made by editing the clothes off a photo.</a:t>
             </a:r>
@@ -5164,7 +5054,7 @@
                 <a:solidFill>
                   <a:srgbClr val="FFFDF7"/>
                 </a:solidFill>
-                <a:latin typeface="Karla"/>
+                <a:latin typeface="Calibri"/>
               </a:rPr>
               <a:t>1</a:t>
             </a:r>
@@ -5203,11 +5093,11 @@
               </a:spcAft>
             </a:pPr>
             <a:r>
-              <a:rPr sz="1400" b="1" i="0">
+              <a:rPr sz="1400" b="0" i="0">
                 <a:solidFill>
                   <a:srgbClr val="036D97"/>
                 </a:solidFill>
-                <a:latin typeface="Libre Caslon Display"/>
+                <a:latin typeface="Georgia"/>
               </a:rPr>
               <a:t>Don’t open it, save it or pass it on</a:t>
             </a:r>
@@ -5250,7 +5140,7 @@
                 <a:solidFill>
                   <a:srgbClr val="5C6552"/>
                 </a:solidFill>
-                <a:latin typeface="Karla"/>
+                <a:latin typeface="Calibri"/>
               </a:rPr>
               <a:t>Not to show a friend, and not to say “look how bad this is”.</a:t>
             </a:r>
@@ -5427,7 +5317,7 @@
                 <a:solidFill>
                   <a:srgbClr val="FFFDF7"/>
                 </a:solidFill>
-                <a:latin typeface="Karla"/>
+                <a:latin typeface="Calibri"/>
               </a:rPr>
               <a:t>2</a:t>
             </a:r>
@@ -5466,11 +5356,11 @@
               </a:spcAft>
             </a:pPr>
             <a:r>
-              <a:rPr sz="1400" b="1" i="0">
+              <a:rPr sz="1400" b="0" i="0">
                 <a:solidFill>
                   <a:srgbClr val="036D97"/>
                 </a:solidFill>
-                <a:latin typeface="Libre Caslon Display"/>
+                <a:latin typeface="Georgia"/>
               </a:rPr>
               <a:t>Tell an adult you trust</a:t>
             </a:r>
@@ -5513,7 +5403,7 @@
                 <a:solidFill>
                   <a:srgbClr val="5C6552"/>
                 </a:solidFill>
-                <a:latin typeface="Karla"/>
+                <a:latin typeface="Calibri"/>
               </a:rPr>
               <a:t>Your form tutor or the safeguarding lead. Tell them straight away.</a:t>
             </a:r>
@@ -5690,7 +5580,7 @@
                 <a:solidFill>
                   <a:srgbClr val="FFFDF7"/>
                 </a:solidFill>
-                <a:latin typeface="Karla"/>
+                <a:latin typeface="Calibri"/>
               </a:rPr>
               <a:t>3</a:t>
             </a:r>
@@ -5729,11 +5619,11 @@
               </a:spcAft>
             </a:pPr>
             <a:r>
-              <a:rPr sz="1400" b="1" i="0">
+              <a:rPr sz="1400" b="0" i="0">
                 <a:solidFill>
                   <a:srgbClr val="036D97"/>
                 </a:solidFill>
-                <a:latin typeface="Libre Caslon Display"/>
+                <a:latin typeface="Georgia"/>
               </a:rPr>
               <a:t>It is against the law</a:t>
             </a:r>
@@ -5776,7 +5666,7 @@
                 <a:solidFill>
                   <a:srgbClr val="5C6552"/>
                 </a:solidFill>
-                <a:latin typeface="Karla"/>
+                <a:latin typeface="Calibri"/>
               </a:rPr>
               <a:t>In the UK, making, keeping or sharing a sexual image of anyone under 18 is a crime, even if AI made it, and even as a joke. Check the law where you are.</a:t>
             </a:r>
@@ -5953,7 +5843,7 @@
                 <a:solidFill>
                   <a:srgbClr val="FFFDF7"/>
                 </a:solidFill>
-                <a:latin typeface="Karla"/>
+                <a:latin typeface="Calibri"/>
               </a:rPr>
               <a:t>4</a:t>
             </a:r>
@@ -5992,11 +5882,11 @@
               </a:spcAft>
             </a:pPr>
             <a:r>
-              <a:rPr sz="1400" b="1" i="0">
+              <a:rPr sz="1400" b="0" i="0">
                 <a:solidFill>
                   <a:srgbClr val="036D97"/>
                 </a:solidFill>
-                <a:latin typeface="Libre Caslon Display"/>
+                <a:latin typeface="Georgia"/>
               </a:rPr>
               <a:t>If it is a picture of you, you have done nothing wrong</a:t>
             </a:r>
@@ -6039,7 +5929,7 @@
                 <a:solidFill>
                   <a:srgbClr val="5C6552"/>
                 </a:solidFill>
-                <a:latin typeface="Karla"/>
+                <a:latin typeface="Calibri"/>
               </a:rPr>
               <a:t>You can ask for it to be taken down. The next slide shows how.</a:t>
             </a:r>
@@ -6107,7 +5997,7 @@
                 <a:solidFill>
                   <a:srgbClr val="8B9179"/>
                 </a:solidFill>
-                <a:latin typeface="Karla"/>
+                <a:latin typeface="Calibri"/>
               </a:rPr>
               <a:t>The Pastoral Guide</a:t>
             </a:r>
@@ -6150,7 +6040,7 @@
                 <a:solidFill>
                   <a:srgbClr val="8B9179"/>
                 </a:solidFill>
-                <a:latin typeface="Karla"/>
+                <a:latin typeface="Calibri"/>
               </a:rPr>
               <a:t>11 / 18</a:t>
             </a:r>
@@ -6221,61 +6111,6 @@
       </p:sp>
       <p:sp>
         <p:nvSpPr>
-          <p:cNvPr id="3" name="Rounded Rectangle 2"/>
-          <p:cNvSpPr/>
-          <p:nvPr/>
-        </p:nvSpPr>
-        <p:spPr>
-          <a:xfrm>
-            <a:off x="685800" y="329184"/>
-            <a:ext cx="1090258" cy="237744"/>
-          </a:xfrm>
-          <a:prstGeom prst="roundRect">
-            <a:avLst>
-              <a:gd name="adj" fmla="val 50000"/>
-            </a:avLst>
-          </a:prstGeom>
-          <a:solidFill>
-            <a:srgbClr val="EDF5F8"/>
-          </a:solidFill>
-          <a:ln>
-            <a:noFill/>
-          </a:ln>
-          <a:effectLst/>
-        </p:spPr>
-        <p:style>
-          <a:lnRef idx="1">
-            <a:schemeClr val="accent1"/>
-          </a:lnRef>
-          <a:fillRef idx="3">
-            <a:schemeClr val="accent1"/>
-          </a:fillRef>
-          <a:effectRef idx="0">
-            <a:schemeClr val="accent1"/>
-          </a:effectRef>
-          <a:fontRef idx="minor">
-            <a:schemeClr val="lt1"/>
-          </a:fontRef>
-        </p:style>
-        <p:txBody>
-          <a:bodyPr rtlCol="0" anchor="ctr" wrap="none" lIns="0" rIns="0" tIns="0" bIns="0"/>
-          <a:lstStyle/>
-          <a:p>
-            <a:pPr algn="ctr"/>
-            <a:r>
-              <a:rPr sz="950" b="1" spc="90">
-                <a:solidFill>
-                  <a:srgbClr val="036D97"/>
-                </a:solidFill>
-                <a:latin typeface="Karla"/>
-              </a:rPr>
-              <a:t>REPORT IT</a:t>
-            </a:r>
-          </a:p>
-        </p:txBody>
-      </p:sp>
-      <p:sp>
-        <p:nvSpPr>
           <p:cNvPr id="4" name="TextBox 3"/>
           <p:cNvSpPr txBox="1"/>
           <p:nvPr/>
@@ -6306,11 +6141,11 @@
               </a:spcAft>
             </a:pPr>
             <a:r>
-              <a:rPr sz="2800" b="1" i="0">
+              <a:rPr sz="2800" b="0" i="0">
                 <a:solidFill>
                   <a:srgbClr val="036D97"/>
                 </a:solidFill>
-                <a:latin typeface="Libre Caslon Display"/>
+                <a:latin typeface="Georgia"/>
               </a:rPr>
               <a:t>Who to tell, and where to report</a:t>
             </a:r>
@@ -6353,7 +6188,7 @@
                 <a:solidFill>
                   <a:srgbClr val="5C6552"/>
                 </a:solidFill>
-                <a:latin typeface="Karla"/>
+                <a:latin typeface="Calibri"/>
               </a:rPr>
               <a:t>Outside the UK, your school’s safeguarding lead knows the local service.</a:t>
             </a:r>
@@ -6526,11 +6361,11 @@
               </a:spcAft>
             </a:pPr>
             <a:r>
-              <a:rPr sz="1350" b="1" i="0">
+              <a:rPr sz="1350" b="0" i="0">
                 <a:solidFill>
                   <a:srgbClr val="036D97"/>
                 </a:solidFill>
-                <a:latin typeface="Libre Caslon Display"/>
+                <a:latin typeface="Georgia"/>
               </a:rPr>
               <a:t>An adult at school</a:t>
             </a:r>
@@ -6573,7 +6408,7 @@
                 <a:solidFill>
                   <a:srgbClr val="5C6552"/>
                 </a:solidFill>
-                <a:latin typeface="Karla"/>
+                <a:latin typeface="Calibri"/>
               </a:rPr>
               <a:t>Your form tutor or the safeguarding lead.</a:t>
             </a:r>
@@ -6746,11 +6581,11 @@
               </a:spcAft>
             </a:pPr>
             <a:r>
-              <a:rPr sz="1350" b="1" i="0">
+              <a:rPr sz="1350" b="0" i="0">
                 <a:solidFill>
                   <a:srgbClr val="036D97"/>
                 </a:solidFill>
-                <a:latin typeface="Libre Caslon Display"/>
+                <a:latin typeface="Georgia"/>
               </a:rPr>
               <a:t>The platform’s report button</a:t>
             </a:r>
@@ -6793,7 +6628,7 @@
                 <a:solidFill>
                   <a:srgbClr val="5C6552"/>
                 </a:solidFill>
-                <a:latin typeface="Karla"/>
+                <a:latin typeface="Calibri"/>
               </a:rPr>
               <a:t>Every app and site has one. It is how a post gets taken down.</a:t>
             </a:r>
@@ -6966,11 +6801,11 @@
               </a:spcAft>
             </a:pPr>
             <a:r>
-              <a:rPr sz="1350" b="1" i="0">
+              <a:rPr sz="1350" b="0" i="0">
                 <a:solidFill>
                   <a:srgbClr val="036D97"/>
                 </a:solidFill>
-                <a:latin typeface="Libre Caslon Display"/>
+                <a:latin typeface="Georgia"/>
               </a:rPr>
               <a:t>Childline (UK)</a:t>
             </a:r>
@@ -7013,7 +6848,7 @@
                 <a:solidFill>
                   <a:srgbClr val="5C6552"/>
                 </a:solidFill>
-                <a:latin typeface="Karla"/>
+                <a:latin typeface="Calibri"/>
               </a:rPr>
               <a:t>Free and private, on 0800 1111 or online. You don’t have to say your name.</a:t>
             </a:r>
@@ -7186,11 +7021,11 @@
               </a:spcAft>
             </a:pPr>
             <a:r>
-              <a:rPr sz="1350" b="1" i="0">
+              <a:rPr sz="1350" b="0" i="0">
                 <a:solidFill>
                   <a:srgbClr val="036D97"/>
                 </a:solidFill>
-                <a:latin typeface="Libre Caslon Display"/>
+                <a:latin typeface="Georgia"/>
               </a:rPr>
               <a:t>Report Remove (UK, under 18)</a:t>
             </a:r>
@@ -7233,7 +7068,7 @@
                 <a:solidFill>
                   <a:srgbClr val="5C6552"/>
                 </a:solidFill>
-                <a:latin typeface="Karla"/>
+                <a:latin typeface="Calibri"/>
               </a:rPr>
               <a:t>Childline and the IWF, for a sexual image or video of you, including a fake one.</a:t>
             </a:r>
@@ -7406,11 +7241,11 @@
               </a:spcAft>
             </a:pPr>
             <a:r>
-              <a:rPr sz="1350" b="1" i="0">
+              <a:rPr sz="1350" b="0" i="0">
                 <a:solidFill>
                   <a:srgbClr val="036D97"/>
                 </a:solidFill>
-                <a:latin typeface="Libre Caslon Display"/>
+                <a:latin typeface="Georgia"/>
               </a:rPr>
               <a:t>CEOP (UK)</a:t>
             </a:r>
@@ -7453,7 +7288,7 @@
                 <a:solidFill>
                   <a:srgbClr val="5C6552"/>
                 </a:solidFill>
-                <a:latin typeface="Karla"/>
+                <a:latin typeface="Calibri"/>
               </a:rPr>
               <a:t>The National Crime Agency’s route for online sexual abuse of a child.</a:t>
             </a:r>
@@ -7521,7 +7356,7 @@
                 <a:solidFill>
                   <a:srgbClr val="8B9179"/>
                 </a:solidFill>
-                <a:latin typeface="Karla"/>
+                <a:latin typeface="Calibri"/>
               </a:rPr>
               <a:t>The Pastoral Guide</a:t>
             </a:r>
@@ -7564,7 +7399,7 @@
                 <a:solidFill>
                   <a:srgbClr val="8B9179"/>
                 </a:solidFill>
-                <a:latin typeface="Karla"/>
+                <a:latin typeface="Calibri"/>
               </a:rPr>
               <a:t>12 / 18</a:t>
             </a:r>
@@ -7635,61 +7470,6 @@
       </p:sp>
       <p:sp>
         <p:nvSpPr>
-          <p:cNvPr id="3" name="Rounded Rectangle 2"/>
-          <p:cNvSpPr/>
-          <p:nvPr/>
-        </p:nvSpPr>
-        <p:spPr>
-          <a:xfrm>
-            <a:off x="685800" y="329184"/>
-            <a:ext cx="960039" cy="237744"/>
-          </a:xfrm>
-          <a:prstGeom prst="roundRect">
-            <a:avLst>
-              <a:gd name="adj" fmla="val 50000"/>
-            </a:avLst>
-          </a:prstGeom>
-          <a:solidFill>
-            <a:srgbClr val="EDF5F8"/>
-          </a:solidFill>
-          <a:ln>
-            <a:noFill/>
-          </a:ln>
-          <a:effectLst/>
-        </p:spPr>
-        <p:style>
-          <a:lnRef idx="1">
-            <a:schemeClr val="accent1"/>
-          </a:lnRef>
-          <a:fillRef idx="3">
-            <a:schemeClr val="accent1"/>
-          </a:fillRef>
-          <a:effectRef idx="0">
-            <a:schemeClr val="accent1"/>
-          </a:effectRef>
-          <a:fontRef idx="minor">
-            <a:schemeClr val="lt1"/>
-          </a:fontRef>
-        </p:style>
-        <p:txBody>
-          <a:bodyPr rtlCol="0" anchor="ctr" wrap="none" lIns="0" rIns="0" tIns="0" bIns="0"/>
-          <a:lstStyle/>
-          <a:p>
-            <a:pPr algn="ctr"/>
-            <a:r>
-              <a:rPr sz="950" b="1" spc="90">
-                <a:solidFill>
-                  <a:srgbClr val="036D97"/>
-                </a:solidFill>
-                <a:latin typeface="Karla"/>
-              </a:rPr>
-              <a:t>IN PAIRS</a:t>
-            </a:r>
-          </a:p>
-        </p:txBody>
-      </p:sp>
-      <p:sp>
-        <p:nvSpPr>
           <p:cNvPr id="4" name="TextBox 3"/>
           <p:cNvSpPr txBox="1"/>
           <p:nvPr/>
@@ -7720,11 +7500,11 @@
               </a:spcAft>
             </a:pPr>
             <a:r>
-              <a:rPr sz="3000" b="1" i="0">
+              <a:rPr sz="3000" b="0" i="0">
                 <a:solidFill>
                   <a:srgbClr val="036D97"/>
                 </a:solidFill>
-                <a:latin typeface="Libre Caslon Display"/>
+                <a:latin typeface="Georgia"/>
               </a:rPr>
               <a:t>Your case</a:t>
             </a:r>
@@ -7901,7 +7681,7 @@
                 <a:solidFill>
                   <a:srgbClr val="FFFDF7"/>
                 </a:solidFill>
-                <a:latin typeface="Karla"/>
+                <a:latin typeface="Calibri"/>
               </a:rPr>
               <a:t>1</a:t>
             </a:r>
@@ -7940,11 +7720,11 @@
               </a:spcAft>
             </a:pPr>
             <a:r>
-              <a:rPr sz="1600" b="1" i="0">
+              <a:rPr sz="1600" b="0" i="0">
                 <a:solidFill>
                   <a:srgbClr val="036D97"/>
                 </a:solidFill>
-                <a:latin typeface="Libre Caslon Display"/>
+                <a:latin typeface="Georgia"/>
               </a:rPr>
               <a:t>Take a case sheet</a:t>
             </a:r>
@@ -7987,7 +7767,7 @@
                 <a:solidFill>
                   <a:srgbClr val="5C6552"/>
                 </a:solidFill>
-                <a:latin typeface="Karla"/>
+                <a:latin typeface="Calibri"/>
               </a:rPr>
               <a:t>Each pair gets one. Read the case together.</a:t>
             </a:r>
@@ -8164,7 +7944,7 @@
                 <a:solidFill>
                   <a:srgbClr val="FFFDF7"/>
                 </a:solidFill>
-                <a:latin typeface="Karla"/>
+                <a:latin typeface="Calibri"/>
               </a:rPr>
               <a:t>2</a:t>
             </a:r>
@@ -8203,11 +7983,11 @@
               </a:spcAft>
             </a:pPr>
             <a:r>
-              <a:rPr sz="1600" b="1" i="0">
+              <a:rPr sz="1600" b="0" i="0">
                 <a:solidFill>
                   <a:srgbClr val="036D97"/>
                 </a:solidFill>
-                <a:latin typeface="Libre Caslon Display"/>
+                <a:latin typeface="Georgia"/>
               </a:rPr>
               <a:t>Fill it in</a:t>
             </a:r>
@@ -8250,7 +8030,7 @@
                 <a:solidFill>
                   <a:srgbClr val="5C6552"/>
                 </a:solidFill>
-                <a:latin typeface="Karla"/>
+                <a:latin typeface="Calibri"/>
               </a:rPr>
               <a:t>What would you check? What would you do? Who would you tell?</a:t>
             </a:r>
@@ -8427,7 +8207,7 @@
                 <a:solidFill>
                   <a:srgbClr val="FFFDF7"/>
                 </a:solidFill>
-                <a:latin typeface="Karla"/>
+                <a:latin typeface="Calibri"/>
               </a:rPr>
               <a:t>3</a:t>
             </a:r>
@@ -8466,11 +8246,11 @@
               </a:spcAft>
             </a:pPr>
             <a:r>
-              <a:rPr sz="1600" b="1" i="0">
+              <a:rPr sz="1600" b="0" i="0">
                 <a:solidFill>
                   <a:srgbClr val="036D97"/>
                 </a:solidFill>
-                <a:latin typeface="Libre Caslon Display"/>
+                <a:latin typeface="Georgia"/>
               </a:rPr>
               <a:t>Use the checks</a:t>
             </a:r>
@@ -8513,7 +8293,7 @@
                 <a:solidFill>
                   <a:srgbClr val="5C6552"/>
                 </a:solidFill>
-                <a:latin typeface="Karla"/>
+                <a:latin typeface="Calibri"/>
               </a:rPr>
               <a:t>Name at least two of the five, and say which number each one is.</a:t>
             </a:r>
@@ -8581,7 +8361,7 @@
                 <a:solidFill>
                   <a:srgbClr val="8B9179"/>
                 </a:solidFill>
-                <a:latin typeface="Karla"/>
+                <a:latin typeface="Calibri"/>
               </a:rPr>
               <a:t>The Pastoral Guide</a:t>
             </a:r>
@@ -8624,7 +8404,7 @@
                 <a:solidFill>
                   <a:srgbClr val="8B9179"/>
                 </a:solidFill>
-                <a:latin typeface="Karla"/>
+                <a:latin typeface="Calibri"/>
               </a:rPr>
               <a:t>13 / 18</a:t>
             </a:r>
@@ -8695,61 +8475,6 @@
       </p:sp>
       <p:sp>
         <p:nvSpPr>
-          <p:cNvPr id="3" name="Rounded Rectangle 2"/>
-          <p:cNvSpPr/>
-          <p:nvPr/>
-        </p:nvSpPr>
-        <p:spPr>
-          <a:xfrm>
-            <a:off x="685800" y="329184"/>
-            <a:ext cx="937572" cy="237744"/>
-          </a:xfrm>
-          <a:prstGeom prst="roundRect">
-            <a:avLst>
-              <a:gd name="adj" fmla="val 50000"/>
-            </a:avLst>
-          </a:prstGeom>
-          <a:solidFill>
-            <a:srgbClr val="EDF5F8"/>
-          </a:solidFill>
-          <a:ln>
-            <a:noFill/>
-          </a:ln>
-          <a:effectLst/>
-        </p:spPr>
-        <p:style>
-          <a:lnRef idx="1">
-            <a:schemeClr val="accent1"/>
-          </a:lnRef>
-          <a:fillRef idx="3">
-            <a:schemeClr val="accent1"/>
-          </a:fillRef>
-          <a:effectRef idx="0">
-            <a:schemeClr val="accent1"/>
-          </a:effectRef>
-          <a:fontRef idx="minor">
-            <a:schemeClr val="lt1"/>
-          </a:fontRef>
-        </p:style>
-        <p:txBody>
-          <a:bodyPr rtlCol="0" anchor="ctr" wrap="none" lIns="0" rIns="0" tIns="0" bIns="0"/>
-          <a:lstStyle/>
-          <a:p>
-            <a:pPr algn="ctr"/>
-            <a:r>
-              <a:rPr sz="950" b="1" spc="90">
-                <a:solidFill>
-                  <a:srgbClr val="036D97"/>
-                </a:solidFill>
-                <a:latin typeface="Karla"/>
-              </a:rPr>
-              <a:t>MARK IT</a:t>
-            </a:r>
-          </a:p>
-        </p:txBody>
-      </p:sp>
-      <p:sp>
-        <p:nvSpPr>
           <p:cNvPr id="4" name="TextBox 3"/>
           <p:cNvSpPr txBox="1"/>
           <p:nvPr/>
@@ -8780,11 +8505,11 @@
               </a:spcAft>
             </a:pPr>
             <a:r>
-              <a:rPr sz="2800" b="1" i="0">
+              <a:rPr sz="2800" b="0" i="0">
                 <a:solidFill>
                   <a:srgbClr val="036D97"/>
                 </a:solidFill>
-                <a:latin typeface="Libre Caslon Display"/>
+                <a:latin typeface="Georgia"/>
               </a:rPr>
               <a:t>Mark another pair’s sheet</a:t>
             </a:r>
@@ -8961,7 +8686,7 @@
                 <a:solidFill>
                   <a:srgbClr val="FFFDF7"/>
                 </a:solidFill>
-                <a:latin typeface="Karla"/>
+                <a:latin typeface="Calibri"/>
               </a:rPr>
               <a:t>1</a:t>
             </a:r>
@@ -9000,11 +8725,11 @@
               </a:spcAft>
             </a:pPr>
             <a:r>
-              <a:rPr sz="1500" b="1" i="0">
+              <a:rPr sz="1500" b="0" i="0">
                 <a:solidFill>
                   <a:srgbClr val="036D97"/>
                 </a:solidFill>
-                <a:latin typeface="Libre Caslon Display"/>
+                <a:latin typeface="Georgia"/>
               </a:rPr>
               <a:t>Swap sheets</a:t>
             </a:r>
@@ -9047,7 +8772,7 @@
                 <a:solidFill>
                   <a:srgbClr val="5C6552"/>
                 </a:solidFill>
-                <a:latin typeface="Karla"/>
+                <a:latin typeface="Calibri"/>
               </a:rPr>
               <a:t>Pass yours to a table that had a different case.</a:t>
             </a:r>
@@ -9224,7 +8949,7 @@
                 <a:solidFill>
                   <a:srgbClr val="FFFDF7"/>
                 </a:solidFill>
-                <a:latin typeface="Karla"/>
+                <a:latin typeface="Calibri"/>
               </a:rPr>
               <a:t>2</a:t>
             </a:r>
@@ -9263,11 +8988,11 @@
               </a:spcAft>
             </a:pPr>
             <a:r>
-              <a:rPr sz="1500" b="1" i="0">
+              <a:rPr sz="1500" b="0" i="0">
                 <a:solidFill>
                   <a:srgbClr val="036D97"/>
                 </a:solidFill>
-                <a:latin typeface="Libre Caslon Display"/>
+                <a:latin typeface="Georgia"/>
               </a:rPr>
               <a:t>Read it through</a:t>
             </a:r>
@@ -9310,7 +9035,7 @@
                 <a:solidFill>
                   <a:srgbClr val="5C6552"/>
                 </a:solidFill>
-                <a:latin typeface="Karla"/>
+                <a:latin typeface="Calibri"/>
               </a:rPr>
               <a:t>Read the case at the top, then the answers.</a:t>
             </a:r>
@@ -9497,7 +9222,7 @@
                 <a:solidFill>
                   <a:srgbClr val="2E3436"/>
                 </a:solidFill>
-                <a:latin typeface="Karla"/>
+                <a:latin typeface="Calibri"/>
               </a:rPr>
               <a:t>Names at least two of the five checks</a:t>
             </a:r>
@@ -9588,7 +9313,7 @@
                 <a:solidFill>
                   <a:srgbClr val="2E3436"/>
                 </a:solidFill>
-                <a:latin typeface="Karla"/>
+                <a:latin typeface="Calibri"/>
               </a:rPr>
               <a:t>Gives a next step that keeps everybody safe</a:t>
             </a:r>
@@ -9679,7 +9404,7 @@
                 <a:solidFill>
                   <a:srgbClr val="2E3436"/>
                 </a:solidFill>
-                <a:latin typeface="Karla"/>
+                <a:latin typeface="Calibri"/>
               </a:rPr>
               <a:t>Says who to tell</a:t>
             </a:r>
@@ -9722,7 +9447,7 @@
                 <a:solidFill>
                   <a:srgbClr val="036D97"/>
                 </a:solidFill>
-                <a:latin typeface="Karla"/>
+                <a:latin typeface="Calibri"/>
               </a:rPr>
               <a:t>Then write one thing you would add.</a:t>
             </a:r>
@@ -9790,7 +9515,7 @@
                 <a:solidFill>
                   <a:srgbClr val="8B9179"/>
                 </a:solidFill>
-                <a:latin typeface="Karla"/>
+                <a:latin typeface="Calibri"/>
               </a:rPr>
               <a:t>The Pastoral Guide</a:t>
             </a:r>
@@ -9833,7 +9558,7 @@
                 <a:solidFill>
                   <a:srgbClr val="8B9179"/>
                 </a:solidFill>
-                <a:latin typeface="Karla"/>
+                <a:latin typeface="Calibri"/>
               </a:rPr>
               <a:t>14 / 18</a:t>
             </a:r>
@@ -9904,61 +9629,6 @@
       </p:sp>
       <p:sp>
         <p:nvSpPr>
-          <p:cNvPr id="3" name="Rounded Rectangle 2"/>
-          <p:cNvSpPr/>
-          <p:nvPr/>
-        </p:nvSpPr>
-        <p:spPr>
-          <a:xfrm>
-            <a:off x="685800" y="329184"/>
-            <a:ext cx="1177620" cy="237744"/>
-          </a:xfrm>
-          <a:prstGeom prst="roundRect">
-            <a:avLst>
-              <a:gd name="adj" fmla="val 50000"/>
-            </a:avLst>
-          </a:prstGeom>
-          <a:solidFill>
-            <a:srgbClr val="EDF5F8"/>
-          </a:solidFill>
-          <a:ln>
-            <a:noFill/>
-          </a:ln>
-          <a:effectLst/>
-        </p:spPr>
-        <p:style>
-          <a:lnRef idx="1">
-            <a:schemeClr val="accent1"/>
-          </a:lnRef>
-          <a:fillRef idx="3">
-            <a:schemeClr val="accent1"/>
-          </a:fillRef>
-          <a:effectRef idx="0">
-            <a:schemeClr val="accent1"/>
-          </a:effectRef>
-          <a:fontRef idx="minor">
-            <a:schemeClr val="lt1"/>
-          </a:fontRef>
-        </p:style>
-        <p:txBody>
-          <a:bodyPr rtlCol="0" anchor="ctr" wrap="none" lIns="0" rIns="0" tIns="0" bIns="0"/>
-          <a:lstStyle/>
-          <a:p>
-            <a:pPr algn="ctr"/>
-            <a:r>
-              <a:rPr sz="950" b="1" spc="90">
-                <a:solidFill>
-                  <a:srgbClr val="036D97"/>
-                </a:solidFill>
-                <a:latin typeface="Karla"/>
-              </a:rPr>
-              <a:t>YOUR TURN</a:t>
-            </a:r>
-          </a:p>
-        </p:txBody>
-      </p:sp>
-      <p:sp>
-        <p:nvSpPr>
           <p:cNvPr id="4" name="TextBox 3"/>
           <p:cNvSpPr txBox="1"/>
           <p:nvPr/>
@@ -9989,11 +9659,11 @@
               </a:spcAft>
             </a:pPr>
             <a:r>
-              <a:rPr sz="2800" b="1" i="0">
+              <a:rPr sz="2800" b="0" i="0">
                 <a:solidFill>
                   <a:srgbClr val="036D97"/>
                 </a:solidFill>
-                <a:latin typeface="Libre Caslon Display"/>
+                <a:latin typeface="Georgia"/>
               </a:rPr>
               <a:t>A card for a Year 7</a:t>
             </a:r>
@@ -10036,7 +9706,7 @@
                 <a:solidFill>
                   <a:srgbClr val="2E3436"/>
                 </a:solidFill>
-                <a:latin typeface="Karla"/>
+                <a:latin typeface="Calibri"/>
               </a:rPr>
               <a:t>Imagine a Year 7 has just been sent something that might be fake. Write the card you would want them to have.</a:t>
             </a:r>
@@ -10213,7 +9883,7 @@
                 <a:solidFill>
                   <a:srgbClr val="FFFDF7"/>
                 </a:solidFill>
-                <a:latin typeface="Karla"/>
+                <a:latin typeface="Calibri"/>
               </a:rPr>
               <a:t>1</a:t>
             </a:r>
@@ -10252,11 +9922,11 @@
               </a:spcAft>
             </a:pPr>
             <a:r>
-              <a:rPr sz="1500" b="1" i="0">
+              <a:rPr sz="1500" b="0" i="0">
                 <a:solidFill>
                   <a:srgbClr val="036D97"/>
                 </a:solidFill>
-                <a:latin typeface="Libre Caslon Display"/>
+                <a:latin typeface="Georgia"/>
               </a:rPr>
               <a:t>Two checks, in your own words</a:t>
             </a:r>
@@ -10299,7 +9969,7 @@
                 <a:solidFill>
                   <a:srgbClr val="5C6552"/>
                 </a:solidFill>
-                <a:latin typeface="Karla"/>
+                <a:latin typeface="Calibri"/>
               </a:rPr>
               <a:t>Not copied from the slide.</a:t>
             </a:r>
@@ -10476,7 +10146,7 @@
                 <a:solidFill>
                   <a:srgbClr val="FFFDF7"/>
                 </a:solidFill>
-                <a:latin typeface="Karla"/>
+                <a:latin typeface="Calibri"/>
               </a:rPr>
               <a:t>2</a:t>
             </a:r>
@@ -10515,11 +10185,11 @@
               </a:spcAft>
             </a:pPr>
             <a:r>
-              <a:rPr sz="1500" b="1" i="0">
+              <a:rPr sz="1500" b="0" i="0">
                 <a:solidFill>
                   <a:srgbClr val="036D97"/>
                 </a:solidFill>
-                <a:latin typeface="Libre Caslon Display"/>
+                <a:latin typeface="Georgia"/>
               </a:rPr>
               <a:t>What to do if you can’t tell</a:t>
             </a:r>
@@ -10562,7 +10232,7 @@
                 <a:solidFill>
                   <a:srgbClr val="5C6552"/>
                 </a:solidFill>
-                <a:latin typeface="Karla"/>
+                <a:latin typeface="Calibri"/>
               </a:rPr>
               <a:t>Say it so a Year 7 would do it.</a:t>
             </a:r>
@@ -10739,7 +10409,7 @@
                 <a:solidFill>
                   <a:srgbClr val="FFFDF7"/>
                 </a:solidFill>
-                <a:latin typeface="Karla"/>
+                <a:latin typeface="Calibri"/>
               </a:rPr>
               <a:t>3</a:t>
             </a:r>
@@ -10778,11 +10448,11 @@
               </a:spcAft>
             </a:pPr>
             <a:r>
-              <a:rPr sz="1500" b="1" i="0">
+              <a:rPr sz="1500" b="0" i="0">
                 <a:solidFill>
                   <a:srgbClr val="036D97"/>
                 </a:solidFill>
-                <a:latin typeface="Libre Caslon Display"/>
+                <a:latin typeface="Georgia"/>
               </a:rPr>
               <a:t>Who to tell</a:t>
             </a:r>
@@ -10825,7 +10495,7 @@
                 <a:solidFill>
                   <a:srgbClr val="5C6552"/>
                 </a:solidFill>
-                <a:latin typeface="Karla"/>
+                <a:latin typeface="Calibri"/>
               </a:rPr>
               <a:t>Name a real person or a real service.</a:t>
             </a:r>
@@ -10893,7 +10563,7 @@
                 <a:solidFill>
                   <a:srgbClr val="8B9179"/>
                 </a:solidFill>
-                <a:latin typeface="Karla"/>
+                <a:latin typeface="Calibri"/>
               </a:rPr>
               <a:t>The Pastoral Guide</a:t>
             </a:r>
@@ -10936,7 +10606,7 @@
                 <a:solidFill>
                   <a:srgbClr val="8B9179"/>
                 </a:solidFill>
-                <a:latin typeface="Karla"/>
+                <a:latin typeface="Calibri"/>
               </a:rPr>
               <a:t>15 / 18</a:t>
             </a:r>
@@ -11007,61 +10677,6 @@
       </p:sp>
       <p:sp>
         <p:nvSpPr>
-          <p:cNvPr id="3" name="Rounded Rectangle 2"/>
-          <p:cNvSpPr/>
-          <p:nvPr/>
-        </p:nvSpPr>
-        <p:spPr>
-          <a:xfrm>
-            <a:off x="685800" y="329184"/>
-            <a:ext cx="1433980" cy="237744"/>
-          </a:xfrm>
-          <a:prstGeom prst="roundRect">
-            <a:avLst>
-              <a:gd name="adj" fmla="val 50000"/>
-            </a:avLst>
-          </a:prstGeom>
-          <a:solidFill>
-            <a:srgbClr val="EDF5F8"/>
-          </a:solidFill>
-          <a:ln>
-            <a:noFill/>
-          </a:ln>
-          <a:effectLst/>
-        </p:spPr>
-        <p:style>
-          <a:lnRef idx="1">
-            <a:schemeClr val="accent1"/>
-          </a:lnRef>
-          <a:fillRef idx="3">
-            <a:schemeClr val="accent1"/>
-          </a:fillRef>
-          <a:effectRef idx="0">
-            <a:schemeClr val="accent1"/>
-          </a:effectRef>
-          <a:fontRef idx="minor">
-            <a:schemeClr val="lt1"/>
-          </a:fontRef>
-        </p:style>
-        <p:txBody>
-          <a:bodyPr rtlCol="0" anchor="ctr" wrap="none" lIns="0" rIns="0" tIns="0" bIns="0"/>
-          <a:lstStyle/>
-          <a:p>
-            <a:pPr algn="ctr"/>
-            <a:r>
-              <a:rPr sz="950" b="1" spc="90">
-                <a:solidFill>
-                  <a:srgbClr val="036D97"/>
-                </a:solidFill>
-                <a:latin typeface="Karla"/>
-              </a:rPr>
-              <a:t>TALK ABOUT IT</a:t>
-            </a:r>
-          </a:p>
-        </p:txBody>
-      </p:sp>
-      <p:sp>
-        <p:nvSpPr>
           <p:cNvPr id="4" name="KEEP_SHADOW"/>
           <p:cNvSpPr/>
           <p:nvPr/>
@@ -11188,11 +10803,11 @@
               </a:spcAft>
             </a:pPr>
             <a:r>
-              <a:rPr sz="2600" b="1" i="0">
+              <a:rPr sz="2372" b="0" i="0">
                 <a:solidFill>
                   <a:srgbClr val="036D97"/>
                 </a:solidFill>
-                <a:latin typeface="Libre Caslon Display"/>
+                <a:latin typeface="Georgia"/>
               </a:rPr>
               <a:t>Is it ever OK to make a fake</a:t>
             </a:r>
@@ -11200,11 +10815,11 @@
               <a:rPr lang="en-GB"/>
             </a:br>
             <a:r>
-              <a:rPr sz="2600" b="1" i="0">
+              <a:rPr sz="2372" b="0" i="0">
                 <a:solidFill>
                   <a:srgbClr val="036D97"/>
                 </a:solidFill>
-                <a:latin typeface="Libre Caslon Display"/>
+                <a:latin typeface="Georgia"/>
               </a:rPr>
               <a:t>of your friend, as a joke?</a:t>
             </a:r>
@@ -11247,7 +10862,7 @@
                 <a:solidFill>
                   <a:srgbClr val="8B9179"/>
                 </a:solidFill>
-                <a:latin typeface="Karla"/>
+                <a:latin typeface="Calibri"/>
               </a:rPr>
               <a:t>THEN ASK</a:t>
             </a:r>
@@ -11334,7 +10949,7 @@
                 <a:solidFill>
                   <a:srgbClr val="2E3436"/>
                 </a:solidFill>
-                <a:latin typeface="Karla"/>
+                <a:latin typeface="Calibri"/>
               </a:rPr>
               <a:t>What would have to be true for it to be OK?</a:t>
             </a:r>
@@ -11421,7 +11036,7 @@
                 <a:solidFill>
                   <a:srgbClr val="2E3436"/>
                 </a:solidFill>
-                <a:latin typeface="Karla"/>
+                <a:latin typeface="Calibri"/>
               </a:rPr>
               <a:t>Who decides: the person who makes it, or the person it shows?</a:t>
             </a:r>
@@ -11508,7 +11123,7 @@
                 <a:solidFill>
                   <a:srgbClr val="2E3436"/>
                 </a:solidFill>
-                <a:latin typeface="Karla"/>
+                <a:latin typeface="Calibri"/>
               </a:rPr>
               <a:t>What changes if it gets shared beyond your friends?</a:t>
             </a:r>
@@ -11576,7 +11191,7 @@
                 <a:solidFill>
                   <a:srgbClr val="8B9179"/>
                 </a:solidFill>
-                <a:latin typeface="Karla"/>
+                <a:latin typeface="Calibri"/>
               </a:rPr>
               <a:t>The Pastoral Guide</a:t>
             </a:r>
@@ -11619,7 +11234,7 @@
                 <a:solidFill>
                   <a:srgbClr val="8B9179"/>
                 </a:solidFill>
-                <a:latin typeface="Karla"/>
+                <a:latin typeface="Calibri"/>
               </a:rPr>
               <a:t>16 / 18</a:t>
             </a:r>
@@ -11736,7 +11351,7 @@
                 <a:solidFill>
                   <a:srgbClr val="036D97"/>
                 </a:solidFill>
-                <a:latin typeface="Karla"/>
+                <a:latin typeface="Calibri"/>
               </a:rPr>
               <a:t>PRIVATE</a:t>
             </a:r>
@@ -11775,11 +11390,11 @@
               </a:spcAft>
             </a:pPr>
             <a:r>
-              <a:rPr sz="2800" b="1" i="0">
+              <a:rPr sz="2800" b="0" i="0">
                 <a:solidFill>
                   <a:srgbClr val="036D97"/>
                 </a:solidFill>
-                <a:latin typeface="Libre Caslon Display"/>
+                <a:latin typeface="Georgia"/>
               </a:rPr>
               <a:t>Your exit slip</a:t>
             </a:r>
@@ -11822,7 +11437,7 @@
                 <a:solidFill>
                   <a:srgbClr val="2E3436"/>
                 </a:solidFill>
-                <a:latin typeface="Karla"/>
+                <a:latin typeface="Calibri"/>
               </a:rPr>
               <a:t>Fold it and keep it. Nobody reads it, and nobody collects it.</a:t>
             </a:r>
@@ -11999,7 +11614,7 @@
                 <a:solidFill>
                   <a:srgbClr val="FFFDF7"/>
                 </a:solidFill>
-                <a:latin typeface="Karla"/>
+                <a:latin typeface="Calibri"/>
               </a:rPr>
               <a:t>1</a:t>
             </a:r>
@@ -12038,11 +11653,11 @@
               </a:spcAft>
             </a:pPr>
             <a:r>
-              <a:rPr sz="1400" b="1" i="0">
+              <a:rPr sz="1400" b="0" i="0">
                 <a:solidFill>
                   <a:srgbClr val="036D97"/>
                 </a:solidFill>
-                <a:latin typeface="Libre Caslon Display"/>
+                <a:latin typeface="Georgia"/>
               </a:rPr>
               <a:t>Question 1</a:t>
             </a:r>
@@ -12085,7 +11700,7 @@
                 <a:solidFill>
                   <a:srgbClr val="5C6552"/>
                 </a:solidFill>
-                <a:latin typeface="Karla"/>
+                <a:latin typeface="Calibri"/>
               </a:rPr>
               <a:t>One thing I will check the next time I am not sure something is real.</a:t>
             </a:r>
@@ -12262,7 +11877,7 @@
                 <a:solidFill>
                   <a:srgbClr val="FFFDF7"/>
                 </a:solidFill>
-                <a:latin typeface="Karla"/>
+                <a:latin typeface="Calibri"/>
               </a:rPr>
               <a:t>2</a:t>
             </a:r>
@@ -12301,11 +11916,11 @@
               </a:spcAft>
             </a:pPr>
             <a:r>
-              <a:rPr sz="1400" b="1" i="0">
+              <a:rPr sz="1400" b="0" i="0">
                 <a:solidFill>
                   <a:srgbClr val="036D97"/>
                 </a:solidFill>
-                <a:latin typeface="Libre Caslon Display"/>
+                <a:latin typeface="Georgia"/>
               </a:rPr>
               <a:t>Question 2</a:t>
             </a:r>
@@ -12348,7 +11963,7 @@
                 <a:solidFill>
                   <a:srgbClr val="5C6552"/>
                 </a:solidFill>
-                <a:latin typeface="Karla"/>
+                <a:latin typeface="Calibri"/>
               </a:rPr>
               <a:t>One adult I could tell if something like this happened to me or a friend.</a:t>
             </a:r>
@@ -12416,7 +12031,7 @@
                 <a:solidFill>
                   <a:srgbClr val="8B9179"/>
                 </a:solidFill>
-                <a:latin typeface="Karla"/>
+                <a:latin typeface="Calibri"/>
               </a:rPr>
               <a:t>The Pastoral Guide</a:t>
             </a:r>
@@ -12459,7 +12074,7 @@
                 <a:solidFill>
                   <a:srgbClr val="8B9179"/>
                 </a:solidFill>
-                <a:latin typeface="Karla"/>
+                <a:latin typeface="Calibri"/>
               </a:rPr>
               <a:t>17 / 18</a:t>
             </a:r>
@@ -12585,11 +12200,11 @@
               </a:spcAft>
             </a:pPr>
             <a:r>
-              <a:rPr sz="3200" b="1" i="0">
+              <a:rPr sz="3200" b="0" i="0">
                 <a:solidFill>
                   <a:srgbClr val="036D97"/>
                 </a:solidFill>
-                <a:latin typeface="Libre Caslon Display"/>
+                <a:latin typeface="Georgia"/>
               </a:rPr>
               <a:t>If something like this happens,</a:t>
             </a:r>
@@ -12597,11 +12212,11 @@
               <a:rPr lang="en-GB"/>
             </a:br>
             <a:r>
-              <a:rPr sz="3200" b="1" i="0">
+              <a:rPr sz="3200" b="0" i="0">
                 <a:solidFill>
                   <a:srgbClr val="036D97"/>
                 </a:solidFill>
-                <a:latin typeface="Libre Caslon Display"/>
+                <a:latin typeface="Georgia"/>
               </a:rPr>
               <a:t>tell an adult.</a:t>
             </a:r>
@@ -12644,7 +12259,7 @@
                 <a:solidFill>
                   <a:srgbClr val="5C6552"/>
                 </a:solidFill>
-                <a:latin typeface="Karla"/>
+                <a:latin typeface="Calibri"/>
               </a:rPr>
               <a:t>Your form tutor or the safeguarding lead, at any time. In the UK, Childline is on 0800 1111.</a:t>
             </a:r>
@@ -12687,7 +12302,7 @@
                 <a:solidFill>
                   <a:srgbClr val="8B9179"/>
                 </a:solidFill>
-                <a:latin typeface="Karla"/>
+                <a:latin typeface="Calibri"/>
               </a:rPr>
               <a:t>More free tutor time lessons at thepastoralguide.com.</a:t>
             </a:r>
@@ -12755,7 +12370,7 @@
                 <a:solidFill>
                   <a:srgbClr val="8B9179"/>
                 </a:solidFill>
-                <a:latin typeface="Karla"/>
+                <a:latin typeface="Calibri"/>
               </a:rPr>
               <a:t>The Pastoral Guide</a:t>
             </a:r>
@@ -12798,7 +12413,7 @@
                 <a:solidFill>
                   <a:srgbClr val="8B9179"/>
                 </a:solidFill>
-                <a:latin typeface="Karla"/>
+                <a:latin typeface="Calibri"/>
               </a:rPr>
               <a:t>18 / 18</a:t>
             </a:r>
@@ -12915,7 +12530,7 @@
                 <a:solidFill>
                   <a:srgbClr val="036D97"/>
                 </a:solidFill>
-                <a:latin typeface="Karla"/>
+                <a:latin typeface="Calibri"/>
               </a:rPr>
               <a:t>ABOUT TODAY</a:t>
             </a:r>
@@ -12954,11 +12569,11 @@
               </a:spcAft>
             </a:pPr>
             <a:r>
-              <a:rPr sz="2600" b="1" i="0">
+              <a:rPr sz="2600" b="0" i="0">
                 <a:solidFill>
                   <a:srgbClr val="FFFDF7"/>
                 </a:solidFill>
-                <a:latin typeface="Libre Caslon Display"/>
+                <a:latin typeface="Georgia"/>
               </a:rPr>
               <a:t>Today is about deciding what to trust online: pictures, video and voices that a computer may have made, and what to do when you can’t tell.</a:t>
             </a:r>
@@ -13045,7 +12660,7 @@
                 <a:solidFill>
                   <a:srgbClr val="B8D6E2"/>
                 </a:solidFill>
-                <a:latin typeface="Karla"/>
+                <a:latin typeface="Calibri"/>
               </a:rPr>
               <a:t>Every case is invented, and nobody will be asked about their own life.</a:t>
             </a:r>
@@ -13113,7 +12728,7 @@
                 <a:solidFill>
                   <a:srgbClr val="B8D6E2"/>
                 </a:solidFill>
-                <a:latin typeface="Karla"/>
+                <a:latin typeface="Calibri"/>
               </a:rPr>
               <a:t>The Pastoral Guide</a:t>
             </a:r>
@@ -13156,7 +12771,7 @@
                 <a:solidFill>
                   <a:srgbClr val="B8D6E2"/>
                 </a:solidFill>
-                <a:latin typeface="Karla"/>
+                <a:latin typeface="Calibri"/>
               </a:rPr>
               <a:t>2 / 18</a:t>
             </a:r>
@@ -13227,61 +12842,6 @@
       </p:sp>
       <p:sp>
         <p:nvSpPr>
-          <p:cNvPr id="3" name="Rounded Rectangle 2"/>
-          <p:cNvSpPr/>
-          <p:nvPr/>
-        </p:nvSpPr>
-        <p:spPr>
-          <a:xfrm>
-            <a:off x="685800" y="329184"/>
-            <a:ext cx="1171965" cy="237744"/>
-          </a:xfrm>
-          <a:prstGeom prst="roundRect">
-            <a:avLst>
-              <a:gd name="adj" fmla="val 50000"/>
-            </a:avLst>
-          </a:prstGeom>
-          <a:solidFill>
-            <a:srgbClr val="EDF5F8"/>
-          </a:solidFill>
-          <a:ln>
-            <a:noFill/>
-          </a:ln>
-          <a:effectLst/>
-        </p:spPr>
-        <p:style>
-          <a:lnRef idx="1">
-            <a:schemeClr val="accent1"/>
-          </a:lnRef>
-          <a:fillRef idx="3">
-            <a:schemeClr val="accent1"/>
-          </a:fillRef>
-          <a:effectRef idx="0">
-            <a:schemeClr val="accent1"/>
-          </a:effectRef>
-          <a:fontRef idx="minor">
-            <a:schemeClr val="lt1"/>
-          </a:fontRef>
-        </p:style>
-        <p:txBody>
-          <a:bodyPr rtlCol="0" anchor="ctr" wrap="none" lIns="0" rIns="0" tIns="0" bIns="0"/>
-          <a:lstStyle/>
-          <a:p>
-            <a:pPr algn="ctr"/>
-            <a:r>
-              <a:rPr sz="950" b="1" spc="90">
-                <a:solidFill>
-                  <a:srgbClr val="036D97"/>
-                </a:solidFill>
-                <a:latin typeface="Karla"/>
-              </a:rPr>
-              <a:t>SORT THEM</a:t>
-            </a:r>
-          </a:p>
-        </p:txBody>
-      </p:sp>
-      <p:sp>
-        <p:nvSpPr>
           <p:cNvPr id="4" name="TextBox 3"/>
           <p:cNvSpPr txBox="1"/>
           <p:nvPr/>
@@ -13312,11 +12872,11 @@
               </a:spcAft>
             </a:pPr>
             <a:r>
-              <a:rPr sz="2800" b="1" i="0">
+              <a:rPr sz="2800" b="0" i="0">
                 <a:solidFill>
                   <a:srgbClr val="036D97"/>
                 </a:solidFill>
-                <a:latin typeface="Libre Caslon Display"/>
+                <a:latin typeface="Georgia"/>
               </a:rPr>
               <a:t>Sort the eight cards</a:t>
             </a:r>
@@ -13359,7 +12919,7 @@
                 <a:solidFill>
                   <a:srgbClr val="5C6552"/>
                 </a:solidFill>
-                <a:latin typeface="Karla"/>
+                <a:latin typeface="Calibri"/>
               </a:rPr>
               <a:t>Work in pairs. Read each card, talk it over, and put it in one pile.</a:t>
             </a:r>
@@ -13511,11 +13071,11 @@
               </a:spcAft>
             </a:pPr>
             <a:r>
-              <a:rPr sz="1350" b="1" i="0">
+              <a:rPr sz="1350" b="0" i="0">
                 <a:solidFill>
                   <a:srgbClr val="036D97"/>
                 </a:solidFill>
-                <a:latin typeface="Libre Caslon Display"/>
+                <a:latin typeface="Georgia"/>
               </a:rPr>
               <a:t>Real</a:t>
             </a:r>
@@ -13558,7 +13118,7 @@
                 <a:solidFill>
                   <a:srgbClr val="5C6552"/>
                 </a:solidFill>
-                <a:latin typeface="Karla"/>
+                <a:latin typeface="Calibri"/>
               </a:rPr>
               <a:t>A person made it, and it shows what really happened.</a:t>
             </a:r>
@@ -13710,11 +13270,11 @@
               </a:spcAft>
             </a:pPr>
             <a:r>
-              <a:rPr sz="1350" b="1" i="0">
+              <a:rPr sz="1350" b="0" i="0">
                 <a:solidFill>
                   <a:srgbClr val="036D97"/>
                 </a:solidFill>
-                <a:latin typeface="Libre Caslon Display"/>
+                <a:latin typeface="Georgia"/>
               </a:rPr>
               <a:t>Made</a:t>
             </a:r>
@@ -13757,7 +13317,7 @@
                 <a:solidFill>
                   <a:srgbClr val="5C6552"/>
                 </a:solidFill>
-                <a:latin typeface="Karla"/>
+                <a:latin typeface="Calibri"/>
               </a:rPr>
               <a:t>A computer made it, or changed it, so it no longer shows what happened.</a:t>
             </a:r>
@@ -13909,11 +13469,11 @@
               </a:spcAft>
             </a:pPr>
             <a:r>
-              <a:rPr sz="1350" b="1" i="0">
+              <a:rPr sz="1350" b="0" i="0">
                 <a:solidFill>
                   <a:srgbClr val="036D97"/>
                 </a:solidFill>
-                <a:latin typeface="Libre Caslon Display"/>
+                <a:latin typeface="Georgia"/>
               </a:rPr>
               <a:t>Can’t tell yet</a:t>
             </a:r>
@@ -13956,7 +13516,7 @@
                 <a:solidFill>
                   <a:srgbClr val="5C6552"/>
                 </a:solidFill>
-                <a:latin typeface="Karla"/>
+                <a:latin typeface="Calibri"/>
               </a:rPr>
               <a:t>There is not enough to decide. This pile is allowed to be big.</a:t>
             </a:r>
@@ -13999,7 +13559,7 @@
                 <a:solidFill>
                   <a:srgbClr val="036D97"/>
                 </a:solidFill>
-                <a:latin typeface="Karla"/>
+                <a:latin typeface="Calibri"/>
               </a:rPr>
               <a:t>Talk each card through before you place it.</a:t>
             </a:r>
@@ -14067,7 +13627,7 @@
                 <a:solidFill>
                   <a:srgbClr val="8B9179"/>
                 </a:solidFill>
-                <a:latin typeface="Karla"/>
+                <a:latin typeface="Calibri"/>
               </a:rPr>
               <a:t>The Pastoral Guide</a:t>
             </a:r>
@@ -14110,7 +13670,7 @@
                 <a:solidFill>
                   <a:srgbClr val="8B9179"/>
                 </a:solidFill>
-                <a:latin typeface="Karla"/>
+                <a:latin typeface="Calibri"/>
               </a:rPr>
               <a:t>3 / 18</a:t>
             </a:r>
@@ -14181,61 +13741,6 @@
       </p:sp>
       <p:sp>
         <p:nvSpPr>
-          <p:cNvPr id="3" name="Rounded Rectangle 2"/>
-          <p:cNvSpPr/>
-          <p:nvPr/>
-        </p:nvSpPr>
-        <p:spPr>
-          <a:xfrm>
-            <a:off x="685800" y="329184"/>
-            <a:ext cx="881618" cy="237744"/>
-          </a:xfrm>
-          <a:prstGeom prst="roundRect">
-            <a:avLst>
-              <a:gd name="adj" fmla="val 50000"/>
-            </a:avLst>
-          </a:prstGeom>
-          <a:solidFill>
-            <a:srgbClr val="EDF5F8"/>
-          </a:solidFill>
-          <a:ln>
-            <a:noFill/>
-          </a:ln>
-          <a:effectLst/>
-        </p:spPr>
-        <p:style>
-          <a:lnRef idx="1">
-            <a:schemeClr val="accent1"/>
-          </a:lnRef>
-          <a:fillRef idx="3">
-            <a:schemeClr val="accent1"/>
-          </a:fillRef>
-          <a:effectRef idx="0">
-            <a:schemeClr val="accent1"/>
-          </a:effectRef>
-          <a:fontRef idx="minor">
-            <a:schemeClr val="lt1"/>
-          </a:fontRef>
-        </p:style>
-        <p:txBody>
-          <a:bodyPr rtlCol="0" anchor="ctr" wrap="none" lIns="0" rIns="0" tIns="0" bIns="0"/>
-          <a:lstStyle/>
-          <a:p>
-            <a:pPr algn="ctr"/>
-            <a:r>
-              <a:rPr sz="950" b="1" spc="90">
-                <a:solidFill>
-                  <a:srgbClr val="036D97"/>
-                </a:solidFill>
-                <a:latin typeface="Karla"/>
-              </a:rPr>
-              <a:t>REVEAL</a:t>
-            </a:r>
-          </a:p>
-        </p:txBody>
-      </p:sp>
-      <p:sp>
-        <p:nvSpPr>
           <p:cNvPr id="4" name="TextBox 3"/>
           <p:cNvSpPr txBox="1"/>
           <p:nvPr/>
@@ -14266,11 +13771,11 @@
               </a:spcAft>
             </a:pPr>
             <a:r>
-              <a:rPr sz="2800" b="1" i="0">
+              <a:rPr sz="2800" b="0" i="0">
                 <a:solidFill>
                   <a:srgbClr val="036D97"/>
                 </a:solidFill>
-                <a:latin typeface="Libre Caslon Display"/>
+                <a:latin typeface="Georgia"/>
               </a:rPr>
               <a:t>What was really going on</a:t>
             </a:r>
@@ -14313,7 +13818,7 @@
                 <a:solidFill>
                   <a:srgbClr val="5C6552"/>
                 </a:solidFill>
-                <a:latin typeface="Karla"/>
+                <a:latin typeface="Calibri"/>
               </a:rPr>
               <a:t>Three real, three made, and two you could not decide from the card alone.</a:t>
             </a:r>
@@ -14490,7 +13995,7 @@
                 <a:solidFill>
                   <a:srgbClr val="FFFDF7"/>
                 </a:solidFill>
-                <a:latin typeface="Karla"/>
+                <a:latin typeface="Calibri"/>
               </a:rPr>
               <a:t>1</a:t>
             </a:r>
@@ -14533,7 +14038,7 @@
                 <a:solidFill>
                   <a:srgbClr val="036D97"/>
                 </a:solidFill>
-                <a:latin typeface="Karla"/>
+                <a:latin typeface="Calibri"/>
               </a:rPr>
               <a:t>Video  ·  Made</a:t>
             </a:r>
@@ -14576,7 +14081,7 @@
                 <a:solidFill>
                   <a:srgbClr val="5C6552"/>
                 </a:solidFill>
-                <a:latin typeface="Karla"/>
+                <a:latin typeface="Calibri"/>
               </a:rPr>
               <a:t>An AI video. It is too perfect, and nobody knows where it started.</a:t>
             </a:r>
@@ -14753,7 +14258,7 @@
                 <a:solidFill>
                   <a:srgbClr val="FFFDF7"/>
                 </a:solidFill>
-                <a:latin typeface="Karla"/>
+                <a:latin typeface="Calibri"/>
               </a:rPr>
               <a:t>2</a:t>
             </a:r>
@@ -14796,7 +14301,7 @@
                 <a:solidFill>
                   <a:srgbClr val="036D97"/>
                 </a:solidFill>
-                <a:latin typeface="Karla"/>
+                <a:latin typeface="Calibri"/>
               </a:rPr>
               <a:t>Voice note  ·  Real</a:t>
             </a:r>
@@ -14839,7 +14344,7 @@
                 <a:solidFill>
                   <a:srgbClr val="5C6552"/>
                 </a:solidFill>
-                <a:latin typeface="Karla"/>
+                <a:latin typeface="Calibri"/>
               </a:rPr>
               <a:t>It came from Sam’s own account and fits what Sam does every day.</a:t>
             </a:r>
@@ -15016,7 +14521,7 @@
                 <a:solidFill>
                   <a:srgbClr val="FFFDF7"/>
                 </a:solidFill>
-                <a:latin typeface="Karla"/>
+                <a:latin typeface="Calibri"/>
               </a:rPr>
               <a:t>3</a:t>
             </a:r>
@@ -15059,7 +14564,7 @@
                 <a:solidFill>
                   <a:srgbClr val="036D97"/>
                 </a:solidFill>
-                <a:latin typeface="Karla"/>
+                <a:latin typeface="Calibri"/>
               </a:rPr>
               <a:t>Photo  ·  Made</a:t>
             </a:r>
@@ -15102,7 +14607,7 @@
                 <a:solidFill>
                   <a:srgbClr val="5C6552"/>
                 </a:solidFill>
-                <a:latin typeface="Karla"/>
+                <a:latin typeface="Calibri"/>
               </a:rPr>
               <a:t>An AI image. A snowman that tall would be news everywhere.</a:t>
             </a:r>
@@ -15279,7 +14784,7 @@
                 <a:solidFill>
                   <a:srgbClr val="FFFDF7"/>
                 </a:solidFill>
-                <a:latin typeface="Karla"/>
+                <a:latin typeface="Calibri"/>
               </a:rPr>
               <a:t>4</a:t>
             </a:r>
@@ -15322,7 +14827,7 @@
                 <a:solidFill>
                   <a:srgbClr val="036D97"/>
                 </a:solidFill>
-                <a:latin typeface="Karla"/>
+                <a:latin typeface="Calibri"/>
               </a:rPr>
               <a:t>Screenshot  ·  Can’t tell</a:t>
             </a:r>
@@ -15365,7 +14870,7 @@
                 <a:solidFill>
                   <a:srgbClr val="5C6552"/>
                 </a:solidFill>
-                <a:latin typeface="Karla"/>
+                <a:latin typeface="Calibri"/>
               </a:rPr>
               <a:t>A screenshot can be edited in a minute, and you can’t see where it came from.</a:t>
             </a:r>
@@ -15542,7 +15047,7 @@
                 <a:solidFill>
                   <a:srgbClr val="FFFDF7"/>
                 </a:solidFill>
-                <a:latin typeface="Karla"/>
+                <a:latin typeface="Calibri"/>
               </a:rPr>
               <a:t>5</a:t>
             </a:r>
@@ -15585,7 +15090,7 @@
                 <a:solidFill>
                   <a:srgbClr val="036D97"/>
                 </a:solidFill>
-                <a:latin typeface="Karla"/>
+                <a:latin typeface="Calibri"/>
               </a:rPr>
               <a:t>Video  ·  Made</a:t>
             </a:r>
@@ -15628,7 +15133,7 @@
                 <a:solidFill>
                   <a:srgbClr val="5C6552"/>
                 </a:solidFill>
-                <a:latin typeface="Karla"/>
+                <a:latin typeface="Calibri"/>
               </a:rPr>
               <a:t>An AI video. The odd blinking gave it away, but better fakes don’t.</a:t>
             </a:r>
@@ -15805,7 +15310,7 @@
                 <a:solidFill>
                   <a:srgbClr val="FFFDF7"/>
                 </a:solidFill>
-                <a:latin typeface="Karla"/>
+                <a:latin typeface="Calibri"/>
               </a:rPr>
               <a:t>6</a:t>
             </a:r>
@@ -15848,7 +15353,7 @@
                 <a:solidFill>
                   <a:srgbClr val="036D97"/>
                 </a:solidFill>
-                <a:latin typeface="Karla"/>
+                <a:latin typeface="Calibri"/>
               </a:rPr>
               <a:t>Photo  ·  Real</a:t>
             </a:r>
@@ -15891,7 +15396,7 @@
                 <a:solidFill>
                   <a:srgbClr val="5C6552"/>
                 </a:solidFill>
-                <a:latin typeface="Karla"/>
+                <a:latin typeface="Calibri"/>
               </a:rPr>
               <a:t>A real photo. Movement blurred her hand. A strange hand does not prove a fake.</a:t>
             </a:r>
@@ -16068,7 +15573,7 @@
                 <a:solidFill>
                   <a:srgbClr val="FFFDF7"/>
                 </a:solidFill>
-                <a:latin typeface="Karla"/>
+                <a:latin typeface="Calibri"/>
               </a:rPr>
               <a:t>7</a:t>
             </a:r>
@@ -16111,7 +15616,7 @@
                 <a:solidFill>
                   <a:srgbClr val="036D97"/>
                 </a:solidFill>
-                <a:latin typeface="Karla"/>
+                <a:latin typeface="Calibri"/>
               </a:rPr>
               <a:t>Voice note  ·  Can’t tell</a:t>
             </a:r>
@@ -16154,7 +15659,7 @@
                 <a:solidFill>
                   <a:srgbClr val="5C6552"/>
                 </a:solidFill>
-                <a:latin typeface="Karla"/>
+                <a:latin typeface="Calibri"/>
               </a:rPr>
               <a:t>A voice can be copied from a few seconds of audio, and you can’t tell who made this one.</a:t>
             </a:r>
@@ -16331,7 +15836,7 @@
                 <a:solidFill>
                   <a:srgbClr val="FFFDF7"/>
                 </a:solidFill>
-                <a:latin typeface="Karla"/>
+                <a:latin typeface="Calibri"/>
               </a:rPr>
               <a:t>8</a:t>
             </a:r>
@@ -16374,7 +15879,7 @@
                 <a:solidFill>
                   <a:srgbClr val="036D97"/>
                 </a:solidFill>
-                <a:latin typeface="Karla"/>
+                <a:latin typeface="Calibri"/>
               </a:rPr>
               <a:t>Video  ·  Real</a:t>
             </a:r>
@@ -16417,7 +15922,7 @@
                 <a:solidFill>
                   <a:srgbClr val="5C6552"/>
                 </a:solidFill>
-                <a:latin typeface="Karla"/>
+                <a:latin typeface="Calibri"/>
               </a:rPr>
               <a:t>A friend filmed it, so there is somebody to ask.</a:t>
             </a:r>
@@ -16485,7 +15990,7 @@
                 <a:solidFill>
                   <a:srgbClr val="8B9179"/>
                 </a:solidFill>
-                <a:latin typeface="Karla"/>
+                <a:latin typeface="Calibri"/>
               </a:rPr>
               <a:t>The Pastoral Guide</a:t>
             </a:r>
@@ -16528,7 +16033,7 @@
                 <a:solidFill>
                   <a:srgbClr val="8B9179"/>
                 </a:solidFill>
-                <a:latin typeface="Karla"/>
+                <a:latin typeface="Calibri"/>
               </a:rPr>
               <a:t>4 / 18</a:t>
             </a:r>
@@ -16599,61 +16104,6 @@
       </p:sp>
       <p:sp>
         <p:nvSpPr>
-          <p:cNvPr id="3" name="Rounded Rectangle 2"/>
-          <p:cNvSpPr/>
-          <p:nvPr/>
-        </p:nvSpPr>
-        <p:spPr>
-          <a:xfrm>
-            <a:off x="685800" y="329184"/>
-            <a:ext cx="798577" cy="237744"/>
-          </a:xfrm>
-          <a:prstGeom prst="roundRect">
-            <a:avLst>
-              <a:gd name="adj" fmla="val 50000"/>
-            </a:avLst>
-          </a:prstGeom>
-          <a:solidFill>
-            <a:srgbClr val="EDF5F8"/>
-          </a:solidFill>
-          <a:ln>
-            <a:noFill/>
-          </a:ln>
-          <a:effectLst/>
-        </p:spPr>
-        <p:style>
-          <a:lnRef idx="1">
-            <a:schemeClr val="accent1"/>
-          </a:lnRef>
-          <a:fillRef idx="3">
-            <a:schemeClr val="accent1"/>
-          </a:fillRef>
-          <a:effectRef idx="0">
-            <a:schemeClr val="accent1"/>
-          </a:effectRef>
-          <a:fontRef idx="minor">
-            <a:schemeClr val="lt1"/>
-          </a:fontRef>
-        </p:style>
-        <p:txBody>
-          <a:bodyPr rtlCol="0" anchor="ctr" wrap="none" lIns="0" rIns="0" tIns="0" bIns="0"/>
-          <a:lstStyle/>
-          <a:p>
-            <a:pPr algn="ctr"/>
-            <a:r>
-              <a:rPr sz="950" b="1" spc="90">
-                <a:solidFill>
-                  <a:srgbClr val="036D97"/>
-                </a:solidFill>
-                <a:latin typeface="Karla"/>
-              </a:rPr>
-              <a:t>LEARN</a:t>
-            </a:r>
-          </a:p>
-        </p:txBody>
-      </p:sp>
-      <p:sp>
-        <p:nvSpPr>
           <p:cNvPr id="4" name="TextBox 3"/>
           <p:cNvSpPr txBox="1"/>
           <p:nvPr/>
@@ -16684,11 +16134,11 @@
               </a:spcAft>
             </a:pPr>
             <a:r>
-              <a:rPr sz="2800" b="1" i="0">
+              <a:rPr sz="2800" b="0" i="0">
                 <a:solidFill>
                   <a:srgbClr val="036D97"/>
                 </a:solidFill>
-                <a:latin typeface="Libre Caslon Display"/>
+                <a:latin typeface="Georgia"/>
               </a:rPr>
               <a:t>What is a deepfake?</a:t>
             </a:r>
@@ -16823,11 +16273,11 @@
               </a:spcAft>
             </a:pPr>
             <a:r>
-              <a:rPr sz="2000" b="1" i="0">
+              <a:rPr sz="2000" b="0" i="0">
                 <a:solidFill>
                   <a:srgbClr val="036D97"/>
                 </a:solidFill>
-                <a:latin typeface="Libre Caslon Display"/>
+                <a:latin typeface="Georgia"/>
               </a:rPr>
               <a:t>Deepfake</a:t>
             </a:r>
@@ -16870,7 +16320,7 @@
                 <a:solidFill>
                   <a:srgbClr val="2E3436"/>
                 </a:solidFill>
-                <a:latin typeface="Karla"/>
+                <a:latin typeface="Calibri"/>
               </a:rPr>
               <a:t>A video, image or voice that AI has made or changed to show a real person doing or saying something they never did.</a:t>
             </a:r>
@@ -16999,11 +16449,11 @@
               </a:spcAft>
             </a:pPr>
             <a:r>
-              <a:rPr sz="2000" b="1" i="0">
+              <a:rPr sz="2000" b="0" i="0">
                 <a:solidFill>
                   <a:srgbClr val="036D97"/>
                 </a:solidFill>
-                <a:latin typeface="Libre Caslon Display"/>
+                <a:latin typeface="Georgia"/>
               </a:rPr>
               <a:t>AI-made content</a:t>
             </a:r>
@@ -17046,7 +16496,7 @@
                 <a:solidFill>
                   <a:srgbClr val="2E3436"/>
                 </a:solidFill>
-                <a:latin typeface="Karla"/>
+                <a:latin typeface="Calibri"/>
               </a:rPr>
               <a:t>Anything a computer creates from a written request: pictures, video, voices and writing. It does not have to show a real person.</a:t>
             </a:r>
@@ -17089,7 +16539,7 @@
                 <a:solidFill>
                   <a:srgbClr val="036D97"/>
                 </a:solidFill>
-                <a:latin typeface="Karla"/>
+                <a:latin typeface="Calibri"/>
               </a:rPr>
               <a:t>Some of it is harmless. Some is made to trick, scare or hurt somebody.</a:t>
             </a:r>
@@ -17157,7 +16607,7 @@
                 <a:solidFill>
                   <a:srgbClr val="8B9179"/>
                 </a:solidFill>
-                <a:latin typeface="Karla"/>
+                <a:latin typeface="Calibri"/>
               </a:rPr>
               <a:t>The Pastoral Guide</a:t>
             </a:r>
@@ -17200,7 +16650,7 @@
                 <a:solidFill>
                   <a:srgbClr val="8B9179"/>
                 </a:solidFill>
-                <a:latin typeface="Karla"/>
+                <a:latin typeface="Calibri"/>
               </a:rPr>
               <a:t>5 / 18</a:t>
             </a:r>
@@ -17271,61 +16721,6 @@
       </p:sp>
       <p:sp>
         <p:nvSpPr>
-          <p:cNvPr id="3" name="Rounded Rectangle 2"/>
-          <p:cNvSpPr/>
-          <p:nvPr/>
-        </p:nvSpPr>
-        <p:spPr>
-          <a:xfrm>
-            <a:off x="685800" y="329184"/>
-            <a:ext cx="798577" cy="237744"/>
-          </a:xfrm>
-          <a:prstGeom prst="roundRect">
-            <a:avLst>
-              <a:gd name="adj" fmla="val 50000"/>
-            </a:avLst>
-          </a:prstGeom>
-          <a:solidFill>
-            <a:srgbClr val="EDF5F8"/>
-          </a:solidFill>
-          <a:ln>
-            <a:noFill/>
-          </a:ln>
-          <a:effectLst/>
-        </p:spPr>
-        <p:style>
-          <a:lnRef idx="1">
-            <a:schemeClr val="accent1"/>
-          </a:lnRef>
-          <a:fillRef idx="3">
-            <a:schemeClr val="accent1"/>
-          </a:fillRef>
-          <a:effectRef idx="0">
-            <a:schemeClr val="accent1"/>
-          </a:effectRef>
-          <a:fontRef idx="minor">
-            <a:schemeClr val="lt1"/>
-          </a:fontRef>
-        </p:style>
-        <p:txBody>
-          <a:bodyPr rtlCol="0" anchor="ctr" wrap="none" lIns="0" rIns="0" tIns="0" bIns="0"/>
-          <a:lstStyle/>
-          <a:p>
-            <a:pPr algn="ctr"/>
-            <a:r>
-              <a:rPr sz="950" b="1" spc="90">
-                <a:solidFill>
-                  <a:srgbClr val="036D97"/>
-                </a:solidFill>
-                <a:latin typeface="Karla"/>
-              </a:rPr>
-              <a:t>LEARN</a:t>
-            </a:r>
-          </a:p>
-        </p:txBody>
-      </p:sp>
-      <p:sp>
-        <p:nvSpPr>
           <p:cNvPr id="4" name="TextBox 3"/>
           <p:cNvSpPr txBox="1"/>
           <p:nvPr/>
@@ -17356,11 +16751,11 @@
               </a:spcAft>
             </a:pPr>
             <a:r>
-              <a:rPr sz="2800" b="1" i="0">
+              <a:rPr sz="2800" b="0" i="0">
                 <a:solidFill>
                   <a:srgbClr val="036D97"/>
                 </a:solidFill>
-                <a:latin typeface="Libre Caslon Display"/>
+                <a:latin typeface="Georgia"/>
               </a:rPr>
               <a:t>Why “can’t tell” is honest</a:t>
             </a:r>
@@ -17489,11 +16884,11 @@
               </a:spcAft>
             </a:pPr>
             <a:r>
-              <a:rPr sz="2800" b="1" i="0">
+              <a:rPr sz="2800" b="0" i="0">
                 <a:solidFill>
                   <a:srgbClr val="036D97"/>
                 </a:solidFill>
-                <a:latin typeface="Libre Caslon Display"/>
+                <a:latin typeface="Georgia"/>
               </a:rPr>
               <a:t>43%</a:t>
             </a:r>
@@ -17536,7 +16931,7 @@
                 <a:solidFill>
                   <a:srgbClr val="5C6552"/>
                 </a:solidFill>
-                <a:latin typeface="Karla"/>
+                <a:latin typeface="Calibri"/>
               </a:rPr>
               <a:t>of people aged 16 and over in the UK had seen a deepfake online in six months. So had 50% of 8 to 15 year olds.</a:t>
             </a:r>
@@ -17665,11 +17060,11 @@
               </a:spcAft>
             </a:pPr>
             <a:r>
-              <a:rPr sz="2800" b="1" i="0">
+              <a:rPr sz="2800" b="0" i="0">
                 <a:solidFill>
                   <a:srgbClr val="036D97"/>
                 </a:solidFill>
-                <a:latin typeface="Libre Caslon Display"/>
+                <a:latin typeface="Georgia"/>
               </a:rPr>
               <a:t>9%</a:t>
             </a:r>
@@ -17712,7 +17107,7 @@
                 <a:solidFill>
                   <a:srgbClr val="5C6552"/>
                 </a:solidFill>
-                <a:latin typeface="Karla"/>
+                <a:latin typeface="Calibri"/>
               </a:rPr>
               <a:t>of those people aged 16 and over said they were confident they could spot one.</a:t>
             </a:r>
@@ -17841,11 +17236,11 @@
               </a:spcAft>
             </a:pPr>
             <a:r>
-              <a:rPr sz="2800" b="1" i="0">
+              <a:rPr sz="2800" b="0" i="0">
                 <a:solidFill>
                   <a:srgbClr val="036D97"/>
                 </a:solidFill>
-                <a:latin typeface="Libre Caslon Display"/>
+                <a:latin typeface="Georgia"/>
               </a:rPr>
               <a:t>3 seconds</a:t>
             </a:r>
@@ -17888,7 +17283,7 @@
                 <a:solidFill>
                   <a:srgbClr val="5C6552"/>
                 </a:solidFill>
-                <a:latin typeface="Karla"/>
+                <a:latin typeface="Calibri"/>
               </a:rPr>
               <a:t>of somebody’s voice can be enough for a scam to copy it, according to one bank’s warning in 2024.</a:t>
             </a:r>
@@ -18027,7 +17422,7 @@
                 <a:solidFill>
                   <a:srgbClr val="036D97"/>
                 </a:solidFill>
-                <a:latin typeface="Karla"/>
+                <a:latin typeface="Calibri"/>
               </a:rPr>
               <a:t>So “can’t tell yet” is often honest. Then you check.</a:t>
             </a:r>
@@ -18070,7 +17465,7 @@
                 <a:solidFill>
                   <a:srgbClr val="8B9179"/>
                 </a:solidFill>
-                <a:latin typeface="Karla"/>
+                <a:latin typeface="Calibri"/>
               </a:rPr>
               <a:t>Ofcom deepfakes polls, June 2024. Starling Bank and Mortar Research, September 2024. Figures will date.</a:t>
             </a:r>
@@ -18138,7 +17533,7 @@
                 <a:solidFill>
                   <a:srgbClr val="8B9179"/>
                 </a:solidFill>
-                <a:latin typeface="Karla"/>
+                <a:latin typeface="Calibri"/>
               </a:rPr>
               <a:t>The Pastoral Guide</a:t>
             </a:r>
@@ -18181,7 +17576,7 @@
                 <a:solidFill>
                   <a:srgbClr val="8B9179"/>
                 </a:solidFill>
-                <a:latin typeface="Karla"/>
+                <a:latin typeface="Calibri"/>
               </a:rPr>
               <a:t>6 / 18</a:t>
             </a:r>
@@ -18252,61 +17647,6 @@
       </p:sp>
       <p:sp>
         <p:nvSpPr>
-          <p:cNvPr id="3" name="Rounded Rectangle 2"/>
-          <p:cNvSpPr/>
-          <p:nvPr/>
-        </p:nvSpPr>
-        <p:spPr>
-          <a:xfrm>
-            <a:off x="685800" y="329184"/>
-            <a:ext cx="798577" cy="237744"/>
-          </a:xfrm>
-          <a:prstGeom prst="roundRect">
-            <a:avLst>
-              <a:gd name="adj" fmla="val 50000"/>
-            </a:avLst>
-          </a:prstGeom>
-          <a:solidFill>
-            <a:srgbClr val="EDF5F8"/>
-          </a:solidFill>
-          <a:ln>
-            <a:noFill/>
-          </a:ln>
-          <a:effectLst/>
-        </p:spPr>
-        <p:style>
-          <a:lnRef idx="1">
-            <a:schemeClr val="accent1"/>
-          </a:lnRef>
-          <a:fillRef idx="3">
-            <a:schemeClr val="accent1"/>
-          </a:fillRef>
-          <a:effectRef idx="0">
-            <a:schemeClr val="accent1"/>
-          </a:effectRef>
-          <a:fontRef idx="minor">
-            <a:schemeClr val="lt1"/>
-          </a:fontRef>
-        </p:style>
-        <p:txBody>
-          <a:bodyPr rtlCol="0" anchor="ctr" wrap="none" lIns="0" rIns="0" tIns="0" bIns="0"/>
-          <a:lstStyle/>
-          <a:p>
-            <a:pPr algn="ctr"/>
-            <a:r>
-              <a:rPr sz="950" b="1" spc="90">
-                <a:solidFill>
-                  <a:srgbClr val="036D97"/>
-                </a:solidFill>
-                <a:latin typeface="Karla"/>
-              </a:rPr>
-              <a:t>LEARN</a:t>
-            </a:r>
-          </a:p>
-        </p:txBody>
-      </p:sp>
-      <p:sp>
-        <p:nvSpPr>
           <p:cNvPr id="4" name="TextBox 3"/>
           <p:cNvSpPr txBox="1"/>
           <p:nvPr/>
@@ -18337,11 +17677,11 @@
               </a:spcAft>
             </a:pPr>
             <a:r>
-              <a:rPr sz="2800" b="1" i="0">
+              <a:rPr sz="2800" b="0" i="0">
                 <a:solidFill>
                   <a:srgbClr val="036D97"/>
                 </a:solidFill>
-                <a:latin typeface="Libre Caslon Display"/>
+                <a:latin typeface="Georgia"/>
               </a:rPr>
               <a:t>Check the source, not the glitch</a:t>
             </a:r>
@@ -18470,11 +17810,11 @@
               </a:spcAft>
             </a:pPr>
             <a:r>
-              <a:rPr sz="1800" b="1" i="0">
+              <a:rPr sz="1800" b="0" i="0">
                 <a:solidFill>
                   <a:srgbClr val="5C6552"/>
                 </a:solidFill>
-                <a:latin typeface="Libre Caslon Display"/>
+                <a:latin typeface="Georgia"/>
               </a:rPr>
               <a:t>Spotting the glitch</a:t>
             </a:r>
@@ -18561,7 +17901,7 @@
                 <a:solidFill>
                   <a:srgbClr val="2E3436"/>
                 </a:solidFill>
-                <a:latin typeface="Karla"/>
+                <a:latin typeface="Calibri"/>
               </a:rPr>
               <a:t>Look for extra fingers, odd blinking or a flat voice.</a:t>
             </a:r>
@@ -18648,7 +17988,7 @@
                 <a:solidFill>
                   <a:srgbClr val="2E3436"/>
                 </a:solidFill>
-                <a:latin typeface="Karla"/>
+                <a:latin typeface="Calibri"/>
               </a:rPr>
               <a:t>It used to be enough. It works less every year.</a:t>
             </a:r>
@@ -18735,7 +18075,7 @@
                 <a:solidFill>
                   <a:srgbClr val="2E3436"/>
                 </a:solidFill>
-                <a:latin typeface="Karla"/>
+                <a:latin typeface="Calibri"/>
               </a:rPr>
               <a:t>Card 6 was a real photo with a strange hand.</a:t>
             </a:r>
@@ -18870,11 +18210,11 @@
               </a:spcAft>
             </a:pPr>
             <a:r>
-              <a:rPr sz="1800" b="1" i="0">
+              <a:rPr sz="1800" b="0" i="0">
                 <a:solidFill>
                   <a:srgbClr val="036D97"/>
                 </a:solidFill>
-                <a:latin typeface="Libre Caslon Display"/>
+                <a:latin typeface="Georgia"/>
               </a:rPr>
               <a:t>Checking the source</a:t>
             </a:r>
@@ -18961,7 +18301,7 @@
                 <a:solidFill>
                   <a:srgbClr val="2E3436"/>
                 </a:solidFill>
-                <a:latin typeface="Karla"/>
+                <a:latin typeface="Calibri"/>
               </a:rPr>
               <a:t>Who posted it first, and where else is it?</a:t>
             </a:r>
@@ -19048,7 +18388,7 @@
                 <a:solidFill>
                   <a:srgbClr val="2E3436"/>
                 </a:solidFill>
-                <a:latin typeface="Karla"/>
+                <a:latin typeface="Calibri"/>
               </a:rPr>
               <a:t>Would they really say or do this?</a:t>
             </a:r>
@@ -19135,7 +18475,7 @@
                 <a:solidFill>
                   <a:srgbClr val="2E3436"/>
                 </a:solidFill>
-                <a:latin typeface="Karla"/>
+                <a:latin typeface="Calibri"/>
               </a:rPr>
               <a:t>Ask them another way.</a:t>
             </a:r>
@@ -19203,7 +18543,7 @@
                 <a:solidFill>
                   <a:srgbClr val="8B9179"/>
                 </a:solidFill>
-                <a:latin typeface="Karla"/>
+                <a:latin typeface="Calibri"/>
               </a:rPr>
               <a:t>The Pastoral Guide</a:t>
             </a:r>
@@ -19246,7 +18586,7 @@
                 <a:solidFill>
                   <a:srgbClr val="8B9179"/>
                 </a:solidFill>
-                <a:latin typeface="Karla"/>
+                <a:latin typeface="Calibri"/>
               </a:rPr>
               <a:t>7 / 18</a:t>
             </a:r>
@@ -19317,61 +18657,6 @@
       </p:sp>
       <p:sp>
         <p:nvSpPr>
-          <p:cNvPr id="3" name="Rounded Rectangle 2"/>
-          <p:cNvSpPr/>
-          <p:nvPr/>
-        </p:nvSpPr>
-        <p:spPr>
-          <a:xfrm>
-            <a:off x="685800" y="329184"/>
-            <a:ext cx="798577" cy="237744"/>
-          </a:xfrm>
-          <a:prstGeom prst="roundRect">
-            <a:avLst>
-              <a:gd name="adj" fmla="val 50000"/>
-            </a:avLst>
-          </a:prstGeom>
-          <a:solidFill>
-            <a:srgbClr val="EDF5F8"/>
-          </a:solidFill>
-          <a:ln>
-            <a:noFill/>
-          </a:ln>
-          <a:effectLst/>
-        </p:spPr>
-        <p:style>
-          <a:lnRef idx="1">
-            <a:schemeClr val="accent1"/>
-          </a:lnRef>
-          <a:fillRef idx="3">
-            <a:schemeClr val="accent1"/>
-          </a:fillRef>
-          <a:effectRef idx="0">
-            <a:schemeClr val="accent1"/>
-          </a:effectRef>
-          <a:fontRef idx="minor">
-            <a:schemeClr val="lt1"/>
-          </a:fontRef>
-        </p:style>
-        <p:txBody>
-          <a:bodyPr rtlCol="0" anchor="ctr" wrap="none" lIns="0" rIns="0" tIns="0" bIns="0"/>
-          <a:lstStyle/>
-          <a:p>
-            <a:pPr algn="ctr"/>
-            <a:r>
-              <a:rPr sz="950" b="1" spc="90">
-                <a:solidFill>
-                  <a:srgbClr val="036D97"/>
-                </a:solidFill>
-                <a:latin typeface="Karla"/>
-              </a:rPr>
-              <a:t>LEARN</a:t>
-            </a:r>
-          </a:p>
-        </p:txBody>
-      </p:sp>
-      <p:sp>
-        <p:nvSpPr>
           <p:cNvPr id="4" name="TextBox 3"/>
           <p:cNvSpPr txBox="1"/>
           <p:nvPr/>
@@ -19402,11 +18687,11 @@
               </a:spcAft>
             </a:pPr>
             <a:r>
-              <a:rPr sz="2800" b="1" i="0">
+              <a:rPr sz="2800" b="0" i="0">
                 <a:solidFill>
                   <a:srgbClr val="036D97"/>
                 </a:solidFill>
-                <a:latin typeface="Libre Caslon Display"/>
+                <a:latin typeface="Georgia"/>
               </a:rPr>
               <a:t>The five checks</a:t>
             </a:r>
@@ -19583,7 +18868,7 @@
                 <a:solidFill>
                   <a:srgbClr val="FFFDF7"/>
                 </a:solidFill>
-                <a:latin typeface="Karla"/>
+                <a:latin typeface="Calibri"/>
               </a:rPr>
               <a:t>1</a:t>
             </a:r>
@@ -19622,11 +18907,11 @@
               </a:spcAft>
             </a:pPr>
             <a:r>
-              <a:rPr sz="1300" b="1" i="0">
+              <a:rPr sz="1300" b="0" i="0">
                 <a:solidFill>
                   <a:srgbClr val="036D97"/>
                 </a:solidFill>
-                <a:latin typeface="Libre Caslon Display"/>
+                <a:latin typeface="Georgia"/>
               </a:rPr>
               <a:t>Who posted it first?</a:t>
             </a:r>
@@ -19669,7 +18954,7 @@
                 <a:solidFill>
                   <a:srgbClr val="5C6552"/>
                 </a:solidFill>
-                <a:latin typeface="Karla"/>
+                <a:latin typeface="Calibri"/>
               </a:rPr>
               <a:t>Find the earliest post. A new account or an unknown name is a warning.</a:t>
             </a:r>
@@ -19846,7 +19131,7 @@
                 <a:solidFill>
                   <a:srgbClr val="FFFDF7"/>
                 </a:solidFill>
-                <a:latin typeface="Karla"/>
+                <a:latin typeface="Calibri"/>
               </a:rPr>
               <a:t>2</a:t>
             </a:r>
@@ -19885,11 +19170,11 @@
               </a:spcAft>
             </a:pPr>
             <a:r>
-              <a:rPr sz="1300" b="1" i="0">
+              <a:rPr sz="1300" b="0" i="0">
                 <a:solidFill>
                   <a:srgbClr val="036D97"/>
                 </a:solidFill>
-                <a:latin typeface="Libre Caslon Display"/>
+                <a:latin typeface="Georgia"/>
               </a:rPr>
               <a:t>Where else is it?</a:t>
             </a:r>
@@ -19932,7 +19217,7 @@
                 <a:solidFill>
                   <a:srgbClr val="5C6552"/>
                 </a:solidFill>
-                <a:latin typeface="Karla"/>
+                <a:latin typeface="Calibri"/>
               </a:rPr>
               <a:t>Big real news turns up in several trusted places. Only in one chat? Be careful.</a:t>
             </a:r>
@@ -20109,7 +19394,7 @@
                 <a:solidFill>
                   <a:srgbClr val="FFFDF7"/>
                 </a:solidFill>
-                <a:latin typeface="Karla"/>
+                <a:latin typeface="Calibri"/>
               </a:rPr>
               <a:t>3</a:t>
             </a:r>
@@ -20148,11 +19433,11 @@
               </a:spcAft>
             </a:pPr>
             <a:r>
-              <a:rPr sz="1300" b="1" i="0">
+              <a:rPr sz="1300" b="0" i="0">
                 <a:solidFill>
                   <a:srgbClr val="036D97"/>
                 </a:solidFill>
-                <a:latin typeface="Libre Caslon Display"/>
+                <a:latin typeface="Georgia"/>
               </a:rPr>
               <a:t>Does it want a fast reaction?</a:t>
             </a:r>
@@ -20195,7 +19480,7 @@
                 <a:solidFill>
                   <a:srgbClr val="5C6552"/>
                 </a:solidFill>
-                <a:latin typeface="Karla"/>
+                <a:latin typeface="Calibri"/>
               </a:rPr>
               <a:t>Fakes and scams push you to act now: send it, pay, tell everyone. Slow down.</a:t>
             </a:r>
@@ -20372,7 +19657,7 @@
                 <a:solidFill>
                   <a:srgbClr val="FFFDF7"/>
                 </a:solidFill>
-                <a:latin typeface="Karla"/>
+                <a:latin typeface="Calibri"/>
               </a:rPr>
               <a:t>4</a:t>
             </a:r>
@@ -20411,11 +19696,11 @@
               </a:spcAft>
             </a:pPr>
             <a:r>
-              <a:rPr sz="1300" b="1" i="0">
+              <a:rPr sz="1300" b="0" i="0">
                 <a:solidFill>
                   <a:srgbClr val="036D97"/>
                 </a:solidFill>
-                <a:latin typeface="Libre Caslon Display"/>
+                <a:latin typeface="Georgia"/>
               </a:rPr>
               <a:t>Would they really say or do this?</a:t>
             </a:r>
@@ -20458,7 +19743,7 @@
                 <a:solidFill>
                   <a:srgbClr val="5C6552"/>
                 </a:solidFill>
-                <a:latin typeface="Karla"/>
+                <a:latin typeface="Calibri"/>
               </a:rPr>
               <a:t>Does it fit what you know about this person, or this place?</a:t>
             </a:r>
@@ -20635,7 +19920,7 @@
                 <a:solidFill>
                   <a:srgbClr val="FFFDF7"/>
                 </a:solidFill>
-                <a:latin typeface="Karla"/>
+                <a:latin typeface="Calibri"/>
               </a:rPr>
               <a:t>5</a:t>
             </a:r>
@@ -20674,11 +19959,11 @@
               </a:spcAft>
             </a:pPr>
             <a:r>
-              <a:rPr sz="1300" b="1" i="0">
+              <a:rPr sz="1300" b="0" i="0">
                 <a:solidFill>
                   <a:srgbClr val="036D97"/>
                 </a:solidFill>
-                <a:latin typeface="Libre Caslon Display"/>
+                <a:latin typeface="Georgia"/>
               </a:rPr>
               <a:t>Can I ask them another way?</a:t>
             </a:r>
@@ -20721,7 +20006,7 @@
                 <a:solidFill>
                   <a:srgbClr val="5C6552"/>
                 </a:solidFill>
-                <a:latin typeface="Karla"/>
+                <a:latin typeface="Calibri"/>
               </a:rPr>
               <a:t>Ask face to face, or ask an adult who would know. Not in the same chat.</a:t>
             </a:r>
@@ -20789,7 +20074,7 @@
                 <a:solidFill>
                   <a:srgbClr val="8B9179"/>
                 </a:solidFill>
-                <a:latin typeface="Karla"/>
+                <a:latin typeface="Calibri"/>
               </a:rPr>
               <a:t>The Pastoral Guide</a:t>
             </a:r>
@@ -20832,7 +20117,7 @@
                 <a:solidFill>
                   <a:srgbClr val="8B9179"/>
                 </a:solidFill>
-                <a:latin typeface="Karla"/>
+                <a:latin typeface="Calibri"/>
               </a:rPr>
               <a:t>8 / 18</a:t>
             </a:r>
@@ -20903,61 +20188,6 @@
       </p:sp>
       <p:sp>
         <p:nvSpPr>
-          <p:cNvPr id="3" name="Rounded Rectangle 2"/>
-          <p:cNvSpPr/>
-          <p:nvPr/>
-        </p:nvSpPr>
-        <p:spPr>
-          <a:xfrm>
-            <a:off x="685800" y="329184"/>
-            <a:ext cx="834098" cy="237744"/>
-          </a:xfrm>
-          <a:prstGeom prst="roundRect">
-            <a:avLst>
-              <a:gd name="adj" fmla="val 50000"/>
-            </a:avLst>
-          </a:prstGeom>
-          <a:solidFill>
-            <a:srgbClr val="EDF5F8"/>
-          </a:solidFill>
-          <a:ln>
-            <a:noFill/>
-          </a:ln>
-          <a:effectLst/>
-        </p:spPr>
-        <p:style>
-          <a:lnRef idx="1">
-            <a:schemeClr val="accent1"/>
-          </a:lnRef>
-          <a:fillRef idx="3">
-            <a:schemeClr val="accent1"/>
-          </a:fillRef>
-          <a:effectRef idx="0">
-            <a:schemeClr val="accent1"/>
-          </a:effectRef>
-          <a:fontRef idx="minor">
-            <a:schemeClr val="lt1"/>
-          </a:fontRef>
-        </p:style>
-        <p:txBody>
-          <a:bodyPr rtlCol="0" anchor="ctr" wrap="none" lIns="0" rIns="0" tIns="0" bIns="0"/>
-          <a:lstStyle/>
-          <a:p>
-            <a:pPr algn="ctr"/>
-            <a:r>
-              <a:rPr sz="950" b="1" spc="90">
-                <a:solidFill>
-                  <a:srgbClr val="036D97"/>
-                </a:solidFill>
-                <a:latin typeface="Karla"/>
-              </a:rPr>
-              <a:t>MODEL</a:t>
-            </a:r>
-          </a:p>
-        </p:txBody>
-      </p:sp>
-      <p:sp>
-        <p:nvSpPr>
           <p:cNvPr id="4" name="TextBox 3"/>
           <p:cNvSpPr txBox="1"/>
           <p:nvPr/>
@@ -20988,11 +20218,11 @@
               </a:spcAft>
             </a:pPr>
             <a:r>
-              <a:rPr sz="2600" b="1" i="0">
+              <a:rPr sz="2600" b="0" i="0">
                 <a:solidFill>
                   <a:srgbClr val="036D97"/>
                 </a:solidFill>
-                <a:latin typeface="Libre Caslon Display"/>
+                <a:latin typeface="Georgia"/>
               </a:rPr>
               <a:t>Model: a voice note</a:t>
             </a:r>
@@ -21035,7 +20265,7 @@
                 <a:solidFill>
                   <a:srgbClr val="2E3436"/>
                 </a:solidFill>
-                <a:latin typeface="Karla"/>
+                <a:latin typeface="Calibri"/>
               </a:rPr>
               <a:t>A voice note goes round the year group chat. It sounds like a teacher: “Tomorrow’s trip is cancelled. Please tell everyone.”</a:t>
             </a:r>
@@ -21168,7 +20398,7 @@
                 <a:solidFill>
                   <a:srgbClr val="036D97"/>
                 </a:solidFill>
-                <a:latin typeface="Karla"/>
+                <a:latin typeface="Calibri"/>
               </a:rPr>
               <a:t>Who first?</a:t>
             </a:r>
@@ -21211,7 +20441,7 @@
                 <a:solidFill>
                   <a:srgbClr val="2E3436"/>
                 </a:solidFill>
-                <a:latin typeface="Karla"/>
+                <a:latin typeface="Calibri"/>
               </a:rPr>
               <a:t>Somebody sent it to a student. Nobody can say who posted it first.</a:t>
             </a:r>
@@ -21344,7 +20574,7 @@
                 <a:solidFill>
                   <a:srgbClr val="036D97"/>
                 </a:solidFill>
-                <a:latin typeface="Karla"/>
+                <a:latin typeface="Calibri"/>
               </a:rPr>
               <a:t>Where else?</a:t>
             </a:r>
@@ -21387,7 +20617,7 @@
                 <a:solidFill>
                   <a:srgbClr val="2E3436"/>
                 </a:solidFill>
-                <a:latin typeface="Karla"/>
+                <a:latin typeface="Calibri"/>
               </a:rPr>
               <a:t>It is not in the school notices, and no teacher has mentioned it.</a:t>
             </a:r>
@@ -21520,7 +20750,7 @@
                 <a:solidFill>
                   <a:srgbClr val="036D97"/>
                 </a:solidFill>
-                <a:latin typeface="Karla"/>
+                <a:latin typeface="Calibri"/>
               </a:rPr>
               <a:t>Fast reaction?</a:t>
             </a:r>
@@ -21563,7 +20793,7 @@
                 <a:solidFill>
                   <a:srgbClr val="2E3436"/>
                 </a:solidFill>
-                <a:latin typeface="Karla"/>
+                <a:latin typeface="Calibri"/>
               </a:rPr>
               <a:t>It says “tell everyone”, so it wants to spread now.</a:t>
             </a:r>
@@ -21696,7 +20926,7 @@
                 <a:solidFill>
                   <a:srgbClr val="036D97"/>
                 </a:solidFill>
-                <a:latin typeface="Karla"/>
+                <a:latin typeface="Calibri"/>
               </a:rPr>
               <a:t>Would they?</a:t>
             </a:r>
@@ -21739,7 +20969,7 @@
                 <a:solidFill>
                   <a:srgbClr val="2E3436"/>
                 </a:solidFill>
-                <a:latin typeface="Karla"/>
+                <a:latin typeface="Calibri"/>
               </a:rPr>
               <a:t>Trips are announced by email or in person, not by voice note.</a:t>
             </a:r>
@@ -21872,7 +21102,7 @@
                 <a:solidFill>
                   <a:srgbClr val="036D97"/>
                 </a:solidFill>
-                <a:latin typeface="Karla"/>
+                <a:latin typeface="Calibri"/>
               </a:rPr>
               <a:t>Ask another way</a:t>
             </a:r>
@@ -21915,7 +21145,7 @@
                 <a:solidFill>
                   <a:srgbClr val="2E3436"/>
                 </a:solidFill>
-                <a:latin typeface="Karla"/>
+                <a:latin typeface="Calibri"/>
               </a:rPr>
               <a:t>I ask the teacher in person tomorrow, or the school office.</a:t>
             </a:r>
@@ -22054,7 +21284,7 @@
                 <a:solidFill>
                   <a:srgbClr val="036D97"/>
                 </a:solidFill>
-                <a:latin typeface="Karla"/>
+                <a:latin typeface="Calibri"/>
               </a:rPr>
               <a:t>I can’t tell whether the voice is real. Four checks say don’t pass it on, so I don’t.</a:t>
             </a:r>
@@ -22122,7 +21352,7 @@
                 <a:solidFill>
                   <a:srgbClr val="8B9179"/>
                 </a:solidFill>
-                <a:latin typeface="Karla"/>
+                <a:latin typeface="Calibri"/>
               </a:rPr>
               <a:t>The Pastoral Guide</a:t>
             </a:r>
@@ -22165,7 +21395,7 @@
                 <a:solidFill>
                   <a:srgbClr val="8B9179"/>
                 </a:solidFill>
-                <a:latin typeface="Karla"/>
+                <a:latin typeface="Calibri"/>
               </a:rPr>
               <a:t>9 / 18</a:t>
             </a:r>
